--- a/pptx_sessions_8_22/第11回_基礎編_受講者用.pptx
+++ b/pptx_sessions_8_22/第11回_基礎編_受講者用.pptx
@@ -1531,7 +1531,9 @@
           </a:ln>
         </p:spPr>
         <p:txBody>
-          <a:bodyPr/>
+          <a:bodyPr wrap="square">
+            <a:normAutofit/>
+          </a:bodyPr>
           <a:p/>
         </p:txBody>
       </p:sp>
@@ -1560,7 +1562,9 @@
           </a:ln>
         </p:spPr>
         <p:txBody>
-          <a:bodyPr/>
+          <a:bodyPr wrap="square">
+            <a:normAutofit/>
+          </a:bodyPr>
           <a:p/>
         </p:txBody>
       </p:sp>
@@ -1582,7 +1586,9 @@
           <a:ln/>
         </p:spPr>
         <p:txBody>
-          <a:bodyPr wrap="square" rtlCol="0" anchor="ctr"/>
+          <a:bodyPr wrap="square" rtlCol="0" anchor="ctr">
+            <a:normAutofit/>
+          </a:bodyPr>
           <a:lstStyle/>
           <a:p>
             <a:pPr algn="ctr" indent="0" marL="0">
@@ -1621,7 +1627,9 @@
           <a:ln/>
         </p:spPr>
         <p:txBody>
-          <a:bodyPr wrap="square" rtlCol="0" anchor="ctr"/>
+          <a:bodyPr wrap="square" rtlCol="0" anchor="ctr">
+            <a:normAutofit/>
+          </a:bodyPr>
           <a:lstStyle/>
           <a:p>
             <a:pPr algn="ctr" indent="0" marL="0">
@@ -1660,7 +1668,9 @@
           <a:ln/>
         </p:spPr>
         <p:txBody>
-          <a:bodyPr wrap="square" rtlCol="0" anchor="ctr"/>
+          <a:bodyPr wrap="square" rtlCol="0" anchor="ctr">
+            <a:normAutofit/>
+          </a:bodyPr>
           <a:lstStyle/>
           <a:p>
             <a:pPr algn="ctr" indent="0" marL="0">
@@ -1699,7 +1709,9 @@
           <a:ln/>
         </p:spPr>
         <p:txBody>
-          <a:bodyPr wrap="square" rtlCol="0" anchor="ctr"/>
+          <a:bodyPr wrap="square" rtlCol="0" anchor="ctr">
+            <a:normAutofit/>
+          </a:bodyPr>
           <a:lstStyle/>
           <a:p>
             <a:pPr algn="ctr" indent="0" marL="0">
@@ -1747,7 +1759,9 @@
           </a:ln>
         </p:spPr>
         <p:txBody>
-          <a:bodyPr/>
+          <a:bodyPr wrap="square">
+            <a:normAutofit/>
+          </a:bodyPr>
           <a:p/>
         </p:txBody>
       </p:sp>
@@ -1769,7 +1783,9 @@
           <a:ln/>
         </p:spPr>
         <p:txBody>
-          <a:bodyPr wrap="square" rtlCol="0" anchor="ctr"/>
+          <a:bodyPr wrap="square" rtlCol="0" anchor="ctr">
+            <a:normAutofit/>
+          </a:bodyPr>
           <a:lstStyle/>
           <a:p>
             <a:pPr algn="ctr" indent="0" marL="0">
@@ -1840,7 +1856,9 @@
           </a:ln>
         </p:spPr>
         <p:txBody>
-          <a:bodyPr/>
+          <a:bodyPr wrap="square">
+            <a:normAutofit/>
+          </a:bodyPr>
           <a:p/>
         </p:txBody>
       </p:sp>
@@ -1869,7 +1887,9 @@
           </a:ln>
         </p:spPr>
         <p:txBody>
-          <a:bodyPr/>
+          <a:bodyPr wrap="square">
+            <a:normAutofit/>
+          </a:bodyPr>
           <a:p/>
         </p:txBody>
       </p:sp>
@@ -1891,7 +1911,9 @@
           <a:ln/>
         </p:spPr>
         <p:txBody>
-          <a:bodyPr wrap="square" rtlCol="0" anchor="ctr"/>
+          <a:bodyPr wrap="square" rtlCol="0" anchor="ctr">
+            <a:normAutofit/>
+          </a:bodyPr>
           <a:lstStyle/>
           <a:p>
             <a:pPr indent="0" marL="0">
@@ -1930,7 +1952,9 @@
           <a:ln/>
         </p:spPr>
         <p:txBody>
-          <a:bodyPr wrap="square" rtlCol="0" anchor="ctr"/>
+          <a:bodyPr wrap="square" rtlCol="0" anchor="ctr">
+            <a:normAutofit/>
+          </a:bodyPr>
           <a:lstStyle/>
           <a:p>
             <a:pPr indent="0" marL="0">
@@ -1978,7 +2002,9 @@
           </a:ln>
         </p:spPr>
         <p:txBody>
-          <a:bodyPr/>
+          <a:bodyPr wrap="square">
+            <a:normAutofit/>
+          </a:bodyPr>
           <a:p/>
         </p:txBody>
       </p:sp>
@@ -2000,7 +2026,9 @@
           <a:ln/>
         </p:spPr>
         <p:txBody>
-          <a:bodyPr wrap="square" rtlCol="0" anchor="ctr"/>
+          <a:bodyPr wrap="square" rtlCol="0" anchor="ctr">
+            <a:normAutofit/>
+          </a:bodyPr>
           <a:lstStyle/>
           <a:p>
             <a:pPr indent="0" marL="0">
@@ -2039,7 +2067,9 @@
           <a:ln/>
         </p:spPr>
         <p:txBody>
-          <a:bodyPr wrap="square" rtlCol="0" anchor="ctr"/>
+          <a:bodyPr wrap="square" rtlCol="0" anchor="ctr">
+            <a:normAutofit/>
+          </a:bodyPr>
           <a:lstStyle/>
           <a:p>
             <a:pPr indent="0" marL="0">
@@ -2078,7 +2108,9 @@
           <a:ln/>
         </p:spPr>
         <p:txBody>
-          <a:bodyPr wrap="square" rtlCol="0" anchor="ctr"/>
+          <a:bodyPr wrap="square" rtlCol="0" anchor="ctr">
+            <a:normAutofit/>
+          </a:bodyPr>
           <a:lstStyle/>
           <a:p>
             <a:pPr indent="0" marL="0">
@@ -2126,7 +2158,9 @@
           </a:ln>
         </p:spPr>
         <p:txBody>
-          <a:bodyPr/>
+          <a:bodyPr wrap="square">
+            <a:normAutofit/>
+          </a:bodyPr>
           <a:p/>
         </p:txBody>
       </p:sp>
@@ -2148,7 +2182,9 @@
           <a:ln/>
         </p:spPr>
         <p:txBody>
-          <a:bodyPr wrap="square" rtlCol="0" anchor="ctr"/>
+          <a:bodyPr wrap="square" rtlCol="0" anchor="ctr">
+            <a:normAutofit/>
+          </a:bodyPr>
           <a:lstStyle/>
           <a:p>
             <a:pPr indent="0" marL="0">
@@ -2187,7 +2223,9 @@
           <a:ln/>
         </p:spPr>
         <p:txBody>
-          <a:bodyPr wrap="square" rtlCol="0" anchor="ctr"/>
+          <a:bodyPr wrap="square" rtlCol="0" anchor="ctr">
+            <a:normAutofit/>
+          </a:bodyPr>
           <a:lstStyle/>
           <a:p>
             <a:pPr indent="0" marL="0">
@@ -2226,7 +2264,9 @@
           <a:ln/>
         </p:spPr>
         <p:txBody>
-          <a:bodyPr wrap="square" rtlCol="0" anchor="ctr"/>
+          <a:bodyPr wrap="square" rtlCol="0" anchor="ctr">
+            <a:normAutofit/>
+          </a:bodyPr>
           <a:lstStyle/>
           <a:p>
             <a:pPr indent="0" marL="0">
@@ -2274,7 +2314,9 @@
           </a:ln>
         </p:spPr>
         <p:txBody>
-          <a:bodyPr/>
+          <a:bodyPr wrap="square">
+            <a:normAutofit/>
+          </a:bodyPr>
           <a:p/>
         </p:txBody>
       </p:sp>
@@ -2296,7 +2338,9 @@
           <a:ln/>
         </p:spPr>
         <p:txBody>
-          <a:bodyPr wrap="square" rtlCol="0" anchor="ctr"/>
+          <a:bodyPr wrap="square" rtlCol="0" anchor="ctr">
+            <a:normAutofit/>
+          </a:bodyPr>
           <a:lstStyle/>
           <a:p>
             <a:pPr indent="0" marL="0">
@@ -2335,7 +2379,9 @@
           <a:ln/>
         </p:spPr>
         <p:txBody>
-          <a:bodyPr wrap="square" rtlCol="0" anchor="ctr"/>
+          <a:bodyPr wrap="square" rtlCol="0" anchor="ctr">
+            <a:normAutofit/>
+          </a:bodyPr>
           <a:lstStyle/>
           <a:p>
             <a:pPr indent="0" marL="0">
@@ -2374,7 +2420,9 @@
           <a:ln/>
         </p:spPr>
         <p:txBody>
-          <a:bodyPr wrap="square" rtlCol="0" anchor="ctr"/>
+          <a:bodyPr wrap="square" rtlCol="0" anchor="ctr">
+            <a:normAutofit/>
+          </a:bodyPr>
           <a:lstStyle/>
           <a:p>
             <a:pPr indent="0" marL="0">
@@ -2413,7 +2461,9 @@
           <a:ln/>
         </p:spPr>
         <p:txBody>
-          <a:bodyPr wrap="square" rtlCol="0" anchor="ctr"/>
+          <a:bodyPr wrap="square" rtlCol="0" anchor="ctr">
+            <a:normAutofit/>
+          </a:bodyPr>
           <a:lstStyle/>
           <a:p>
             <a:pPr algn="r" indent="0" marL="0">
@@ -2484,7 +2534,9 @@
           </a:ln>
         </p:spPr>
         <p:txBody>
-          <a:bodyPr/>
+          <a:bodyPr wrap="square">
+            <a:normAutofit/>
+          </a:bodyPr>
           <a:p/>
         </p:txBody>
       </p:sp>
@@ -2513,7 +2565,9 @@
           </a:ln>
         </p:spPr>
         <p:txBody>
-          <a:bodyPr/>
+          <a:bodyPr wrap="square">
+            <a:normAutofit/>
+          </a:bodyPr>
           <a:p/>
         </p:txBody>
       </p:sp>
@@ -2535,7 +2589,9 @@
           <a:ln/>
         </p:spPr>
         <p:txBody>
-          <a:bodyPr wrap="square" rtlCol="0" anchor="ctr"/>
+          <a:bodyPr wrap="square" rtlCol="0" anchor="ctr">
+            <a:normAutofit/>
+          </a:bodyPr>
           <a:lstStyle/>
           <a:p>
             <a:pPr indent="0" marL="0">
@@ -2574,7 +2630,9 @@
           <a:ln/>
         </p:spPr>
         <p:txBody>
-          <a:bodyPr wrap="square" rtlCol="0" anchor="ctr"/>
+          <a:bodyPr wrap="square" rtlCol="0" anchor="ctr">
+            <a:normAutofit/>
+          </a:bodyPr>
           <a:lstStyle/>
           <a:p>
             <a:pPr indent="0" marL="0">
@@ -2620,7 +2678,9 @@
           </a:ln>
         </p:spPr>
         <p:txBody>
-          <a:bodyPr/>
+          <a:bodyPr wrap="square">
+            <a:normAutofit/>
+          </a:bodyPr>
           <a:p/>
         </p:txBody>
       </p:sp>
@@ -2651,7 +2711,9 @@
           </a:ln>
         </p:spPr>
         <p:txBody>
-          <a:bodyPr/>
+          <a:bodyPr wrap="square">
+            <a:normAutofit/>
+          </a:bodyPr>
           <a:p/>
         </p:txBody>
       </p:sp>
@@ -2673,7 +2735,9 @@
           <a:ln/>
         </p:spPr>
         <p:txBody>
-          <a:bodyPr wrap="square" rtlCol="0" anchor="ctr"/>
+          <a:bodyPr wrap="square" rtlCol="0" anchor="ctr">
+            <a:normAutofit/>
+          </a:bodyPr>
           <a:lstStyle/>
           <a:p>
             <a:pPr algn="ctr" indent="0" marL="0">
@@ -2712,7 +2776,9 @@
           <a:ln/>
         </p:spPr>
         <p:txBody>
-          <a:bodyPr wrap="square" rtlCol="0" anchor="ctr"/>
+          <a:bodyPr wrap="square" rtlCol="0" anchor="ctr">
+            <a:normAutofit/>
+          </a:bodyPr>
           <a:lstStyle/>
           <a:p>
             <a:pPr indent="0" marL="0">
@@ -2758,7 +2824,9 @@
           </a:ln>
         </p:spPr>
         <p:txBody>
-          <a:bodyPr/>
+          <a:bodyPr wrap="square">
+            <a:normAutofit/>
+          </a:bodyPr>
           <a:p/>
         </p:txBody>
       </p:sp>
@@ -2789,7 +2857,9 @@
           </a:ln>
         </p:spPr>
         <p:txBody>
-          <a:bodyPr/>
+          <a:bodyPr wrap="square">
+            <a:normAutofit/>
+          </a:bodyPr>
           <a:p/>
         </p:txBody>
       </p:sp>
@@ -2811,7 +2881,9 @@
           <a:ln/>
         </p:spPr>
         <p:txBody>
-          <a:bodyPr wrap="square" rtlCol="0" anchor="ctr"/>
+          <a:bodyPr wrap="square" rtlCol="0" anchor="ctr">
+            <a:normAutofit/>
+          </a:bodyPr>
           <a:lstStyle/>
           <a:p>
             <a:pPr algn="ctr" indent="0" marL="0">
@@ -2850,7 +2922,9 @@
           <a:ln/>
         </p:spPr>
         <p:txBody>
-          <a:bodyPr wrap="square" rtlCol="0" anchor="ctr"/>
+          <a:bodyPr wrap="square" rtlCol="0" anchor="ctr">
+            <a:normAutofit/>
+          </a:bodyPr>
           <a:lstStyle/>
           <a:p>
             <a:pPr indent="0" marL="0">
@@ -2889,7 +2963,9 @@
           <a:ln/>
         </p:spPr>
         <p:txBody>
-          <a:bodyPr wrap="square" rtlCol="0" anchor="ctr"/>
+          <a:bodyPr wrap="square" rtlCol="0" anchor="ctr">
+            <a:normAutofit/>
+          </a:bodyPr>
           <a:lstStyle/>
           <a:p>
             <a:pPr indent="0" marL="0">
@@ -2937,7 +3013,9 @@
           </a:ln>
         </p:spPr>
         <p:txBody>
-          <a:bodyPr/>
+          <a:bodyPr wrap="square">
+            <a:normAutofit/>
+          </a:bodyPr>
           <a:p/>
         </p:txBody>
       </p:sp>
@@ -2968,7 +3046,9 @@
           </a:ln>
         </p:spPr>
         <p:txBody>
-          <a:bodyPr/>
+          <a:bodyPr wrap="square">
+            <a:normAutofit/>
+          </a:bodyPr>
           <a:p/>
         </p:txBody>
       </p:sp>
@@ -2990,7 +3070,9 @@
           <a:ln/>
         </p:spPr>
         <p:txBody>
-          <a:bodyPr wrap="square" rtlCol="0" anchor="ctr"/>
+          <a:bodyPr wrap="square" rtlCol="0" anchor="ctr">
+            <a:normAutofit/>
+          </a:bodyPr>
           <a:lstStyle/>
           <a:p>
             <a:pPr algn="ctr" indent="0" marL="0">
@@ -3029,7 +3111,9 @@
           <a:ln/>
         </p:spPr>
         <p:txBody>
-          <a:bodyPr wrap="square" rtlCol="0" anchor="ctr"/>
+          <a:bodyPr wrap="square" rtlCol="0" anchor="ctr">
+            <a:normAutofit/>
+          </a:bodyPr>
           <a:lstStyle/>
           <a:p>
             <a:pPr indent="0" marL="0">
@@ -3077,7 +3161,9 @@
           </a:ln>
         </p:spPr>
         <p:txBody>
-          <a:bodyPr/>
+          <a:bodyPr wrap="square">
+            <a:normAutofit/>
+          </a:bodyPr>
           <a:p/>
         </p:txBody>
       </p:sp>
@@ -3108,7 +3194,9 @@
           </a:ln>
         </p:spPr>
         <p:txBody>
-          <a:bodyPr/>
+          <a:bodyPr wrap="square">
+            <a:normAutofit/>
+          </a:bodyPr>
           <a:p/>
         </p:txBody>
       </p:sp>
@@ -3130,7 +3218,9 @@
           <a:ln/>
         </p:spPr>
         <p:txBody>
-          <a:bodyPr wrap="square" rtlCol="0" anchor="ctr"/>
+          <a:bodyPr wrap="square" rtlCol="0" anchor="ctr">
+            <a:normAutofit/>
+          </a:bodyPr>
           <a:lstStyle/>
           <a:p>
             <a:pPr algn="ctr" indent="0" marL="0">
@@ -3169,7 +3259,9 @@
           <a:ln/>
         </p:spPr>
         <p:txBody>
-          <a:bodyPr wrap="square" rtlCol="0" anchor="ctr"/>
+          <a:bodyPr wrap="square" rtlCol="0" anchor="ctr">
+            <a:normAutofit/>
+          </a:bodyPr>
           <a:lstStyle/>
           <a:p>
             <a:pPr indent="0" marL="0">
@@ -3217,7 +3309,9 @@
           </a:ln>
         </p:spPr>
         <p:txBody>
-          <a:bodyPr/>
+          <a:bodyPr wrap="square">
+            <a:normAutofit/>
+          </a:bodyPr>
           <a:p/>
         </p:txBody>
       </p:sp>
@@ -3248,7 +3342,9 @@
           </a:ln>
         </p:spPr>
         <p:txBody>
-          <a:bodyPr/>
+          <a:bodyPr wrap="square">
+            <a:normAutofit/>
+          </a:bodyPr>
           <a:p/>
         </p:txBody>
       </p:sp>
@@ -3270,7 +3366,9 @@
           <a:ln/>
         </p:spPr>
         <p:txBody>
-          <a:bodyPr wrap="square" rtlCol="0" anchor="ctr"/>
+          <a:bodyPr wrap="square" rtlCol="0" anchor="ctr">
+            <a:normAutofit/>
+          </a:bodyPr>
           <a:lstStyle/>
           <a:p>
             <a:pPr algn="ctr" indent="0" marL="0">
@@ -3309,7 +3407,9 @@
           <a:ln/>
         </p:spPr>
         <p:txBody>
-          <a:bodyPr wrap="square" rtlCol="0" anchor="ctr"/>
+          <a:bodyPr wrap="square" rtlCol="0" anchor="ctr">
+            <a:normAutofit/>
+          </a:bodyPr>
           <a:lstStyle/>
           <a:p>
             <a:pPr indent="0" marL="0">
@@ -3357,7 +3457,9 @@
           </a:ln>
         </p:spPr>
         <p:txBody>
-          <a:bodyPr/>
+          <a:bodyPr wrap="square">
+            <a:normAutofit/>
+          </a:bodyPr>
           <a:p/>
         </p:txBody>
       </p:sp>
@@ -3388,7 +3490,9 @@
           </a:ln>
         </p:spPr>
         <p:txBody>
-          <a:bodyPr/>
+          <a:bodyPr wrap="square">
+            <a:normAutofit/>
+          </a:bodyPr>
           <a:p/>
         </p:txBody>
       </p:sp>
@@ -3410,7 +3514,9 @@
           <a:ln/>
         </p:spPr>
         <p:txBody>
-          <a:bodyPr wrap="square" rtlCol="0" anchor="ctr"/>
+          <a:bodyPr wrap="square" rtlCol="0" anchor="ctr">
+            <a:normAutofit/>
+          </a:bodyPr>
           <a:lstStyle/>
           <a:p>
             <a:pPr algn="ctr" indent="0" marL="0">
@@ -3449,7 +3555,9 @@
           <a:ln/>
         </p:spPr>
         <p:txBody>
-          <a:bodyPr wrap="square" rtlCol="0" anchor="ctr"/>
+          <a:bodyPr wrap="square" rtlCol="0" anchor="ctr">
+            <a:normAutofit/>
+          </a:bodyPr>
           <a:lstStyle/>
           <a:p>
             <a:pPr indent="0" marL="0">
@@ -3497,7 +3605,9 @@
           </a:ln>
         </p:spPr>
         <p:txBody>
-          <a:bodyPr/>
+          <a:bodyPr wrap="square">
+            <a:normAutofit/>
+          </a:bodyPr>
           <a:p/>
         </p:txBody>
       </p:sp>
@@ -3528,7 +3638,9 @@
           </a:ln>
         </p:spPr>
         <p:txBody>
-          <a:bodyPr/>
+          <a:bodyPr wrap="square">
+            <a:normAutofit/>
+          </a:bodyPr>
           <a:p/>
         </p:txBody>
       </p:sp>
@@ -3550,7 +3662,9 @@
           <a:ln/>
         </p:spPr>
         <p:txBody>
-          <a:bodyPr wrap="square" rtlCol="0" anchor="ctr"/>
+          <a:bodyPr wrap="square" rtlCol="0" anchor="ctr">
+            <a:normAutofit/>
+          </a:bodyPr>
           <a:lstStyle/>
           <a:p>
             <a:pPr algn="ctr" indent="0" marL="0">
@@ -3589,7 +3703,9 @@
           <a:ln/>
         </p:spPr>
         <p:txBody>
-          <a:bodyPr wrap="square" rtlCol="0" anchor="ctr"/>
+          <a:bodyPr wrap="square" rtlCol="0" anchor="ctr">
+            <a:normAutofit/>
+          </a:bodyPr>
           <a:lstStyle/>
           <a:p>
             <a:pPr indent="0" marL="0">
@@ -3628,7 +3744,9 @@
           <a:ln/>
         </p:spPr>
         <p:txBody>
-          <a:bodyPr wrap="square" rtlCol="0" anchor="ctr"/>
+          <a:bodyPr wrap="square" rtlCol="0" anchor="ctr">
+            <a:normAutofit/>
+          </a:bodyPr>
           <a:lstStyle/>
           <a:p>
             <a:pPr algn="r" indent="0" marL="0">
@@ -3699,7 +3817,9 @@
           </a:ln>
         </p:spPr>
         <p:txBody>
-          <a:bodyPr/>
+          <a:bodyPr wrap="square">
+            <a:normAutofit/>
+          </a:bodyPr>
           <a:p/>
         </p:txBody>
       </p:sp>
@@ -3728,7 +3848,9 @@
           </a:ln>
         </p:spPr>
         <p:txBody>
-          <a:bodyPr/>
+          <a:bodyPr wrap="square">
+            <a:normAutofit/>
+          </a:bodyPr>
           <a:p/>
         </p:txBody>
       </p:sp>
@@ -3759,7 +3881,9 @@
           </a:ln>
         </p:spPr>
         <p:txBody>
-          <a:bodyPr/>
+          <a:bodyPr wrap="square">
+            <a:normAutofit/>
+          </a:bodyPr>
           <a:p/>
         </p:txBody>
       </p:sp>
@@ -3781,7 +3905,9 @@
           <a:ln/>
         </p:spPr>
         <p:txBody>
-          <a:bodyPr wrap="square" rtlCol="0" anchor="ctr"/>
+          <a:bodyPr wrap="square" rtlCol="0" anchor="ctr">
+            <a:normAutofit/>
+          </a:bodyPr>
           <a:lstStyle/>
           <a:p>
             <a:pPr algn="ctr" indent="0" marL="0">
@@ -3820,7 +3946,9 @@
           <a:ln/>
         </p:spPr>
         <p:txBody>
-          <a:bodyPr wrap="square" rtlCol="0" anchor="ctr"/>
+          <a:bodyPr wrap="square" rtlCol="0" anchor="ctr">
+            <a:normAutofit/>
+          </a:bodyPr>
           <a:lstStyle/>
           <a:p>
             <a:pPr indent="0" marL="0">
@@ -3859,7 +3987,9 @@
           <a:ln/>
         </p:spPr>
         <p:txBody>
-          <a:bodyPr wrap="square" rtlCol="0" anchor="ctr"/>
+          <a:bodyPr wrap="square" rtlCol="0" anchor="ctr">
+            <a:normAutofit/>
+          </a:bodyPr>
           <a:lstStyle/>
           <a:p>
             <a:pPr indent="0" marL="0">
@@ -3907,7 +4037,9 @@
           </a:ln>
         </p:spPr>
         <p:txBody>
-          <a:bodyPr/>
+          <a:bodyPr wrap="square">
+            <a:normAutofit/>
+          </a:bodyPr>
           <a:p/>
         </p:txBody>
       </p:sp>
@@ -3929,7 +4061,9 @@
           <a:ln/>
         </p:spPr>
         <p:txBody>
-          <a:bodyPr wrap="square" rtlCol="0" anchor="ctr"/>
+          <a:bodyPr wrap="square" rtlCol="0" anchor="ctr">
+            <a:normAutofit/>
+          </a:bodyPr>
           <a:lstStyle/>
           <a:p>
             <a:pPr indent="0" marL="0">
@@ -3968,7 +4102,9 @@
           <a:ln/>
         </p:spPr>
         <p:txBody>
-          <a:bodyPr wrap="square" rtlCol="0" anchor="t"/>
+          <a:bodyPr wrap="square" rtlCol="0" anchor="t">
+            <a:normAutofit/>
+          </a:bodyPr>
           <a:lstStyle/>
           <a:p>
             <a:pPr indent="0" marL="0">
@@ -4126,7 +4262,9 @@
           <a:ln/>
         </p:spPr>
         <p:txBody>
-          <a:bodyPr wrap="square" rtlCol="0" anchor="ctr"/>
+          <a:bodyPr wrap="square" rtlCol="0" anchor="ctr">
+            <a:normAutofit/>
+          </a:bodyPr>
           <a:lstStyle/>
           <a:p>
             <a:pPr algn="r" indent="0" marL="0">
@@ -4197,7 +4335,9 @@
           </a:ln>
         </p:spPr>
         <p:txBody>
-          <a:bodyPr/>
+          <a:bodyPr wrap="square">
+            <a:normAutofit/>
+          </a:bodyPr>
           <a:p/>
         </p:txBody>
       </p:sp>
@@ -4226,7 +4366,9 @@
           </a:ln>
         </p:spPr>
         <p:txBody>
-          <a:bodyPr/>
+          <a:bodyPr wrap="square">
+            <a:normAutofit/>
+          </a:bodyPr>
           <a:p/>
         </p:txBody>
       </p:sp>
@@ -4257,7 +4399,9 @@
           </a:ln>
         </p:spPr>
         <p:txBody>
-          <a:bodyPr/>
+          <a:bodyPr wrap="square">
+            <a:normAutofit/>
+          </a:bodyPr>
           <a:p/>
         </p:txBody>
       </p:sp>
@@ -4279,7 +4423,9 @@
           <a:ln/>
         </p:spPr>
         <p:txBody>
-          <a:bodyPr wrap="square" rtlCol="0" anchor="ctr"/>
+          <a:bodyPr wrap="square" rtlCol="0" anchor="ctr">
+            <a:normAutofit/>
+          </a:bodyPr>
           <a:lstStyle/>
           <a:p>
             <a:pPr algn="ctr" indent="0" marL="0">
@@ -4318,7 +4464,9 @@
           <a:ln/>
         </p:spPr>
         <p:txBody>
-          <a:bodyPr wrap="square" rtlCol="0" anchor="ctr"/>
+          <a:bodyPr wrap="square" rtlCol="0" anchor="ctr">
+            <a:normAutofit/>
+          </a:bodyPr>
           <a:lstStyle/>
           <a:p>
             <a:pPr indent="0" marL="0">
@@ -4357,7 +4505,9 @@
           <a:ln/>
         </p:spPr>
         <p:txBody>
-          <a:bodyPr wrap="square" rtlCol="0" anchor="ctr"/>
+          <a:bodyPr wrap="square" rtlCol="0" anchor="ctr">
+            <a:normAutofit/>
+          </a:bodyPr>
           <a:lstStyle/>
           <a:p>
             <a:pPr indent="0" marL="0">
@@ -4405,7 +4555,9 @@
           </a:ln>
         </p:spPr>
         <p:txBody>
-          <a:bodyPr/>
+          <a:bodyPr wrap="square">
+            <a:normAutofit/>
+          </a:bodyPr>
           <a:p/>
         </p:txBody>
       </p:sp>
@@ -4427,7 +4579,9 @@
           <a:ln/>
         </p:spPr>
         <p:txBody>
-          <a:bodyPr wrap="square" rtlCol="0" anchor="ctr"/>
+          <a:bodyPr wrap="square" rtlCol="0" anchor="ctr">
+            <a:normAutofit/>
+          </a:bodyPr>
           <a:lstStyle/>
           <a:p>
             <a:pPr indent="0" marL="0">
@@ -4466,7 +4620,9 @@
           <a:ln/>
         </p:spPr>
         <p:txBody>
-          <a:bodyPr wrap="square" rtlCol="0" anchor="ctr"/>
+          <a:bodyPr wrap="square" rtlCol="0" anchor="ctr">
+            <a:normAutofit/>
+          </a:bodyPr>
           <a:lstStyle/>
           <a:p>
             <a:pPr indent="0" marL="0">
@@ -4505,7 +4661,9 @@
           <a:ln/>
         </p:spPr>
         <p:txBody>
-          <a:bodyPr wrap="square" rtlCol="0" anchor="t"/>
+          <a:bodyPr wrap="square" rtlCol="0" anchor="t">
+            <a:normAutofit/>
+          </a:bodyPr>
           <a:lstStyle/>
           <a:p>
             <a:pPr indent="0" marL="0">
@@ -4544,7 +4702,9 @@
           <a:ln/>
         </p:spPr>
         <p:txBody>
-          <a:bodyPr wrap="square" rtlCol="0" anchor="ctr"/>
+          <a:bodyPr wrap="square" rtlCol="0" anchor="ctr">
+            <a:normAutofit/>
+          </a:bodyPr>
           <a:lstStyle/>
           <a:p>
             <a:pPr indent="0" marL="0">
@@ -4583,7 +4743,9 @@
           <a:ln/>
         </p:spPr>
         <p:txBody>
-          <a:bodyPr wrap="square" rtlCol="0" anchor="t"/>
+          <a:bodyPr wrap="square" rtlCol="0" anchor="t">
+            <a:normAutofit/>
+          </a:bodyPr>
           <a:lstStyle/>
           <a:p>
             <a:pPr indent="0" marL="0">
@@ -4622,7 +4784,9 @@
           <a:ln/>
         </p:spPr>
         <p:txBody>
-          <a:bodyPr wrap="square" rtlCol="0" anchor="ctr"/>
+          <a:bodyPr wrap="square" rtlCol="0" anchor="ctr">
+            <a:normAutofit/>
+          </a:bodyPr>
           <a:lstStyle/>
           <a:p>
             <a:pPr indent="0" marL="0">
@@ -4661,7 +4825,9 @@
           <a:ln/>
         </p:spPr>
         <p:txBody>
-          <a:bodyPr wrap="square" rtlCol="0" anchor="t"/>
+          <a:bodyPr wrap="square" rtlCol="0" anchor="t">
+            <a:normAutofit/>
+          </a:bodyPr>
           <a:lstStyle/>
           <a:p>
             <a:pPr indent="0" marL="0">
@@ -4709,7 +4875,9 @@
           </a:ln>
         </p:spPr>
         <p:txBody>
-          <a:bodyPr/>
+          <a:bodyPr wrap="square">
+            <a:normAutofit/>
+          </a:bodyPr>
           <a:p/>
         </p:txBody>
       </p:sp>
@@ -4731,7 +4899,9 @@
           <a:ln/>
         </p:spPr>
         <p:txBody>
-          <a:bodyPr wrap="square" rtlCol="0" anchor="ctr"/>
+          <a:bodyPr wrap="square" rtlCol="0" anchor="ctr">
+            <a:normAutofit/>
+          </a:bodyPr>
           <a:lstStyle/>
           <a:p>
             <a:pPr indent="0" marL="0">
@@ -4770,7 +4940,9 @@
           <a:ln/>
         </p:spPr>
         <p:txBody>
-          <a:bodyPr wrap="square" rtlCol="0" anchor="t"/>
+          <a:bodyPr wrap="square" rtlCol="0" anchor="t">
+            <a:normAutofit/>
+          </a:bodyPr>
           <a:lstStyle/>
           <a:p>
             <a:pPr indent="0" marL="0">
@@ -4809,7 +4981,9 @@
           <a:ln/>
         </p:spPr>
         <p:txBody>
-          <a:bodyPr wrap="square" rtlCol="0" anchor="t"/>
+          <a:bodyPr wrap="square" rtlCol="0" anchor="t">
+            <a:normAutofit/>
+          </a:bodyPr>
           <a:lstStyle/>
           <a:p>
             <a:pPr indent="0" marL="0">
@@ -4848,7 +5022,9 @@
           <a:ln/>
         </p:spPr>
         <p:txBody>
-          <a:bodyPr wrap="square" rtlCol="0" anchor="t"/>
+          <a:bodyPr wrap="square" rtlCol="0" anchor="t">
+            <a:normAutofit/>
+          </a:bodyPr>
           <a:lstStyle/>
           <a:p>
             <a:pPr indent="0" marL="0">
@@ -4887,7 +5063,9 @@
           <a:ln/>
         </p:spPr>
         <p:txBody>
-          <a:bodyPr wrap="square" rtlCol="0" anchor="ctr"/>
+          <a:bodyPr wrap="square" rtlCol="0" anchor="ctr">
+            <a:normAutofit/>
+          </a:bodyPr>
           <a:lstStyle/>
           <a:p>
             <a:pPr algn="r" indent="0" marL="0">
@@ -4958,7 +5136,9 @@
           </a:ln>
         </p:spPr>
         <p:txBody>
-          <a:bodyPr/>
+          <a:bodyPr wrap="square">
+            <a:normAutofit/>
+          </a:bodyPr>
           <a:p/>
         </p:txBody>
       </p:sp>
@@ -4987,7 +5167,9 @@
           </a:ln>
         </p:spPr>
         <p:txBody>
-          <a:bodyPr/>
+          <a:bodyPr wrap="square">
+            <a:normAutofit/>
+          </a:bodyPr>
           <a:p/>
         </p:txBody>
       </p:sp>
@@ -5018,7 +5200,9 @@
           </a:ln>
         </p:spPr>
         <p:txBody>
-          <a:bodyPr/>
+          <a:bodyPr wrap="square">
+            <a:normAutofit/>
+          </a:bodyPr>
           <a:p/>
         </p:txBody>
       </p:sp>
@@ -5040,7 +5224,9 @@
           <a:ln/>
         </p:spPr>
         <p:txBody>
-          <a:bodyPr wrap="square" rtlCol="0" anchor="ctr"/>
+          <a:bodyPr wrap="square" rtlCol="0" anchor="ctr">
+            <a:normAutofit/>
+          </a:bodyPr>
           <a:lstStyle/>
           <a:p>
             <a:pPr algn="ctr" indent="0" marL="0">
@@ -5079,7 +5265,9 @@
           <a:ln/>
         </p:spPr>
         <p:txBody>
-          <a:bodyPr wrap="square" rtlCol="0" anchor="ctr"/>
+          <a:bodyPr wrap="square" rtlCol="0" anchor="ctr">
+            <a:normAutofit/>
+          </a:bodyPr>
           <a:lstStyle/>
           <a:p>
             <a:pPr indent="0" marL="0">
@@ -5118,7 +5306,9 @@
           <a:ln/>
         </p:spPr>
         <p:txBody>
-          <a:bodyPr wrap="square" rtlCol="0" anchor="ctr"/>
+          <a:bodyPr wrap="square" rtlCol="0" anchor="ctr">
+            <a:normAutofit/>
+          </a:bodyPr>
           <a:lstStyle/>
           <a:p>
             <a:pPr indent="0" marL="0">
@@ -5166,7 +5356,9 @@
           </a:ln>
         </p:spPr>
         <p:txBody>
-          <a:bodyPr/>
+          <a:bodyPr wrap="square">
+            <a:normAutofit/>
+          </a:bodyPr>
           <a:p/>
         </p:txBody>
       </p:sp>
@@ -5188,7 +5380,9 @@
           <a:ln/>
         </p:spPr>
         <p:txBody>
-          <a:bodyPr wrap="square" rtlCol="0" anchor="ctr"/>
+          <a:bodyPr wrap="square" rtlCol="0" anchor="ctr">
+            <a:normAutofit/>
+          </a:bodyPr>
           <a:lstStyle/>
           <a:p>
             <a:pPr indent="0" marL="0">
@@ -5227,7 +5421,9 @@
           <a:ln/>
         </p:spPr>
         <p:txBody>
-          <a:bodyPr wrap="square" rtlCol="0" anchor="t"/>
+          <a:bodyPr wrap="square" rtlCol="0" anchor="t">
+            <a:normAutofit/>
+          </a:bodyPr>
           <a:lstStyle/>
           <a:p>
             <a:pPr indent="0" marL="0">
@@ -5504,7 +5700,9 @@
           <a:ln/>
         </p:spPr>
         <p:txBody>
-          <a:bodyPr wrap="square" rtlCol="0" anchor="ctr"/>
+          <a:bodyPr wrap="square" rtlCol="0" anchor="ctr">
+            <a:normAutofit/>
+          </a:bodyPr>
           <a:lstStyle/>
           <a:p>
             <a:pPr algn="r" indent="0" marL="0">
@@ -5575,7 +5773,9 @@
           </a:ln>
         </p:spPr>
         <p:txBody>
-          <a:bodyPr/>
+          <a:bodyPr wrap="square">
+            <a:normAutofit/>
+          </a:bodyPr>
           <a:p/>
         </p:txBody>
       </p:sp>
@@ -5604,7 +5804,9 @@
           </a:ln>
         </p:spPr>
         <p:txBody>
-          <a:bodyPr/>
+          <a:bodyPr wrap="square">
+            <a:normAutofit/>
+          </a:bodyPr>
           <a:p/>
         </p:txBody>
       </p:sp>
@@ -5635,7 +5837,9 @@
           </a:ln>
         </p:spPr>
         <p:txBody>
-          <a:bodyPr/>
+          <a:bodyPr wrap="square">
+            <a:normAutofit/>
+          </a:bodyPr>
           <a:p/>
         </p:txBody>
       </p:sp>
@@ -5657,7 +5861,9 @@
           <a:ln/>
         </p:spPr>
         <p:txBody>
-          <a:bodyPr wrap="square" rtlCol="0" anchor="ctr"/>
+          <a:bodyPr wrap="square" rtlCol="0" anchor="ctr">
+            <a:normAutofit/>
+          </a:bodyPr>
           <a:lstStyle/>
           <a:p>
             <a:pPr algn="ctr" indent="0" marL="0">
@@ -5696,7 +5902,9 @@
           <a:ln/>
         </p:spPr>
         <p:txBody>
-          <a:bodyPr wrap="square" rtlCol="0" anchor="ctr"/>
+          <a:bodyPr wrap="square" rtlCol="0" anchor="ctr">
+            <a:normAutofit/>
+          </a:bodyPr>
           <a:lstStyle/>
           <a:p>
             <a:pPr indent="0" marL="0">
@@ -5735,7 +5943,9 @@
           <a:ln/>
         </p:spPr>
         <p:txBody>
-          <a:bodyPr wrap="square" rtlCol="0" anchor="ctr"/>
+          <a:bodyPr wrap="square" rtlCol="0" anchor="ctr">
+            <a:normAutofit/>
+          </a:bodyPr>
           <a:lstStyle/>
           <a:p>
             <a:pPr indent="0" marL="0">
@@ -5783,7 +5993,9 @@
           </a:ln>
         </p:spPr>
         <p:txBody>
-          <a:bodyPr/>
+          <a:bodyPr wrap="square">
+            <a:normAutofit/>
+          </a:bodyPr>
           <a:p/>
         </p:txBody>
       </p:sp>
@@ -5805,7 +6017,9 @@
           <a:ln/>
         </p:spPr>
         <p:txBody>
-          <a:bodyPr wrap="square" rtlCol="0" anchor="ctr"/>
+          <a:bodyPr wrap="square" rtlCol="0" anchor="ctr">
+            <a:normAutofit/>
+          </a:bodyPr>
           <a:lstStyle/>
           <a:p>
             <a:pPr indent="0" marL="0">
@@ -5844,7 +6058,9 @@
           <a:ln/>
         </p:spPr>
         <p:txBody>
-          <a:bodyPr wrap="square" rtlCol="0" anchor="ctr"/>
+          <a:bodyPr wrap="square" rtlCol="0" anchor="ctr">
+            <a:normAutofit/>
+          </a:bodyPr>
           <a:lstStyle/>
           <a:p>
             <a:pPr indent="0" marL="0">
@@ -5883,7 +6099,9 @@
           <a:ln/>
         </p:spPr>
         <p:txBody>
-          <a:bodyPr wrap="square" rtlCol="0" anchor="t"/>
+          <a:bodyPr wrap="square" rtlCol="0" anchor="t">
+            <a:normAutofit/>
+          </a:bodyPr>
           <a:lstStyle/>
           <a:p>
             <a:pPr indent="0" marL="0">
@@ -5922,7 +6140,9 @@
           <a:ln/>
         </p:spPr>
         <p:txBody>
-          <a:bodyPr wrap="square" rtlCol="0" anchor="ctr"/>
+          <a:bodyPr wrap="square" rtlCol="0" anchor="ctr">
+            <a:normAutofit/>
+          </a:bodyPr>
           <a:lstStyle/>
           <a:p>
             <a:pPr indent="0" marL="0">
@@ -5961,7 +6181,9 @@
           <a:ln/>
         </p:spPr>
         <p:txBody>
-          <a:bodyPr wrap="square" rtlCol="0" anchor="t"/>
+          <a:bodyPr wrap="square" rtlCol="0" anchor="t">
+            <a:normAutofit/>
+          </a:bodyPr>
           <a:lstStyle/>
           <a:p>
             <a:pPr indent="0" marL="0">
@@ -6000,7 +6222,9 @@
           <a:ln/>
         </p:spPr>
         <p:txBody>
-          <a:bodyPr wrap="square" rtlCol="0" anchor="ctr"/>
+          <a:bodyPr wrap="square" rtlCol="0" anchor="ctr">
+            <a:normAutofit/>
+          </a:bodyPr>
           <a:lstStyle/>
           <a:p>
             <a:pPr indent="0" marL="0">
@@ -6039,7 +6263,9 @@
           <a:ln/>
         </p:spPr>
         <p:txBody>
-          <a:bodyPr wrap="square" rtlCol="0" anchor="t"/>
+          <a:bodyPr wrap="square" rtlCol="0" anchor="t">
+            <a:normAutofit/>
+          </a:bodyPr>
           <a:lstStyle/>
           <a:p>
             <a:pPr indent="0" marL="0">
@@ -6087,7 +6313,9 @@
           </a:ln>
         </p:spPr>
         <p:txBody>
-          <a:bodyPr/>
+          <a:bodyPr wrap="square">
+            <a:normAutofit/>
+          </a:bodyPr>
           <a:p/>
         </p:txBody>
       </p:sp>
@@ -6109,7 +6337,9 @@
           <a:ln/>
         </p:spPr>
         <p:txBody>
-          <a:bodyPr wrap="square" rtlCol="0" anchor="ctr"/>
+          <a:bodyPr wrap="square" rtlCol="0" anchor="ctr">
+            <a:normAutofit/>
+          </a:bodyPr>
           <a:lstStyle/>
           <a:p>
             <a:pPr indent="0" marL="0">
@@ -6148,7 +6378,9 @@
           <a:ln/>
         </p:spPr>
         <p:txBody>
-          <a:bodyPr wrap="square" rtlCol="0" anchor="t"/>
+          <a:bodyPr wrap="square" rtlCol="0" anchor="t">
+            <a:normAutofit/>
+          </a:bodyPr>
           <a:lstStyle/>
           <a:p>
             <a:pPr indent="0" marL="0">
@@ -6187,7 +6419,9 @@
           <a:ln/>
         </p:spPr>
         <p:txBody>
-          <a:bodyPr wrap="square" rtlCol="0" anchor="t"/>
+          <a:bodyPr wrap="square" rtlCol="0" anchor="t">
+            <a:normAutofit/>
+          </a:bodyPr>
           <a:lstStyle/>
           <a:p>
             <a:pPr indent="0" marL="0">
@@ -6226,7 +6460,9 @@
           <a:ln/>
         </p:spPr>
         <p:txBody>
-          <a:bodyPr wrap="square" rtlCol="0" anchor="t"/>
+          <a:bodyPr wrap="square" rtlCol="0" anchor="t">
+            <a:normAutofit/>
+          </a:bodyPr>
           <a:lstStyle/>
           <a:p>
             <a:pPr indent="0" marL="0">
@@ -6265,7 +6501,9 @@
           <a:ln/>
         </p:spPr>
         <p:txBody>
-          <a:bodyPr wrap="square" rtlCol="0" anchor="ctr"/>
+          <a:bodyPr wrap="square" rtlCol="0" anchor="ctr">
+            <a:normAutofit/>
+          </a:bodyPr>
           <a:lstStyle/>
           <a:p>
             <a:pPr algn="r" indent="0" marL="0">
@@ -6336,7 +6574,9 @@
           </a:ln>
         </p:spPr>
         <p:txBody>
-          <a:bodyPr/>
+          <a:bodyPr wrap="square">
+            <a:normAutofit/>
+          </a:bodyPr>
           <a:p/>
         </p:txBody>
       </p:sp>
@@ -6365,7 +6605,9 @@
           </a:ln>
         </p:spPr>
         <p:txBody>
-          <a:bodyPr/>
+          <a:bodyPr wrap="square">
+            <a:normAutofit/>
+          </a:bodyPr>
           <a:p/>
         </p:txBody>
       </p:sp>
@@ -6396,7 +6638,9 @@
           </a:ln>
         </p:spPr>
         <p:txBody>
-          <a:bodyPr/>
+          <a:bodyPr wrap="square">
+            <a:normAutofit/>
+          </a:bodyPr>
           <a:p/>
         </p:txBody>
       </p:sp>
@@ -6418,7 +6662,9 @@
           <a:ln/>
         </p:spPr>
         <p:txBody>
-          <a:bodyPr wrap="square" rtlCol="0" anchor="ctr"/>
+          <a:bodyPr wrap="square" rtlCol="0" anchor="ctr">
+            <a:normAutofit/>
+          </a:bodyPr>
           <a:lstStyle/>
           <a:p>
             <a:pPr algn="ctr" indent="0" marL="0">
@@ -6457,7 +6703,9 @@
           <a:ln/>
         </p:spPr>
         <p:txBody>
-          <a:bodyPr wrap="square" rtlCol="0" anchor="ctr"/>
+          <a:bodyPr wrap="square" rtlCol="0" anchor="ctr">
+            <a:normAutofit/>
+          </a:bodyPr>
           <a:lstStyle/>
           <a:p>
             <a:pPr indent="0" marL="0">
@@ -6496,7 +6744,9 @@
           <a:ln/>
         </p:spPr>
         <p:txBody>
-          <a:bodyPr wrap="square" rtlCol="0" anchor="ctr"/>
+          <a:bodyPr wrap="square" rtlCol="0" anchor="ctr">
+            <a:normAutofit/>
+          </a:bodyPr>
           <a:lstStyle/>
           <a:p>
             <a:pPr indent="0" marL="0">
@@ -6544,7 +6794,9 @@
           </a:ln>
         </p:spPr>
         <p:txBody>
-          <a:bodyPr/>
+          <a:bodyPr wrap="square">
+            <a:normAutofit/>
+          </a:bodyPr>
           <a:p/>
         </p:txBody>
       </p:sp>
@@ -6566,7 +6818,9 @@
           <a:ln/>
         </p:spPr>
         <p:txBody>
-          <a:bodyPr wrap="square" rtlCol="0" anchor="ctr"/>
+          <a:bodyPr wrap="square" rtlCol="0" anchor="ctr">
+            <a:normAutofit/>
+          </a:bodyPr>
           <a:lstStyle/>
           <a:p>
             <a:pPr indent="0" marL="0">
@@ -6605,7 +6859,9 @@
           <a:ln/>
         </p:spPr>
         <p:txBody>
-          <a:bodyPr wrap="square" rtlCol="0" anchor="ctr"/>
+          <a:bodyPr wrap="square" rtlCol="0" anchor="ctr">
+            <a:normAutofit/>
+          </a:bodyPr>
           <a:lstStyle/>
           <a:p>
             <a:pPr indent="0" marL="0">
@@ -6644,7 +6900,9 @@
           <a:ln/>
         </p:spPr>
         <p:txBody>
-          <a:bodyPr wrap="square" rtlCol="0" anchor="t"/>
+          <a:bodyPr wrap="square" rtlCol="0" anchor="t">
+            <a:normAutofit/>
+          </a:bodyPr>
           <a:lstStyle/>
           <a:p>
             <a:pPr indent="0" marL="0">
@@ -6683,7 +6941,9 @@
           <a:ln/>
         </p:spPr>
         <p:txBody>
-          <a:bodyPr wrap="square" rtlCol="0" anchor="ctr"/>
+          <a:bodyPr wrap="square" rtlCol="0" anchor="ctr">
+            <a:normAutofit/>
+          </a:bodyPr>
           <a:lstStyle/>
           <a:p>
             <a:pPr indent="0" marL="0">
@@ -6722,7 +6982,9 @@
           <a:ln/>
         </p:spPr>
         <p:txBody>
-          <a:bodyPr wrap="square" rtlCol="0" anchor="t"/>
+          <a:bodyPr wrap="square" rtlCol="0" anchor="t">
+            <a:normAutofit/>
+          </a:bodyPr>
           <a:lstStyle/>
           <a:p>
             <a:pPr indent="0" marL="0">
@@ -6761,7 +7023,9 @@
           <a:ln/>
         </p:spPr>
         <p:txBody>
-          <a:bodyPr wrap="square" rtlCol="0" anchor="ctr"/>
+          <a:bodyPr wrap="square" rtlCol="0" anchor="ctr">
+            <a:normAutofit/>
+          </a:bodyPr>
           <a:lstStyle/>
           <a:p>
             <a:pPr indent="0" marL="0">
@@ -6800,7 +7064,9 @@
           <a:ln/>
         </p:spPr>
         <p:txBody>
-          <a:bodyPr wrap="square" rtlCol="0" anchor="t"/>
+          <a:bodyPr wrap="square" rtlCol="0" anchor="t">
+            <a:normAutofit/>
+          </a:bodyPr>
           <a:lstStyle/>
           <a:p>
             <a:pPr indent="0" marL="0">
@@ -6848,7 +7114,9 @@
           </a:ln>
         </p:spPr>
         <p:txBody>
-          <a:bodyPr/>
+          <a:bodyPr wrap="square">
+            <a:normAutofit/>
+          </a:bodyPr>
           <a:p/>
         </p:txBody>
       </p:sp>
@@ -6870,7 +7138,9 @@
           <a:ln/>
         </p:spPr>
         <p:txBody>
-          <a:bodyPr wrap="square" rtlCol="0" anchor="ctr"/>
+          <a:bodyPr wrap="square" rtlCol="0" anchor="ctr">
+            <a:normAutofit/>
+          </a:bodyPr>
           <a:lstStyle/>
           <a:p>
             <a:pPr indent="0" marL="0">
@@ -6909,7 +7179,9 @@
           <a:ln/>
         </p:spPr>
         <p:txBody>
-          <a:bodyPr wrap="square" rtlCol="0" anchor="t"/>
+          <a:bodyPr wrap="square" rtlCol="0" anchor="t">
+            <a:normAutofit/>
+          </a:bodyPr>
           <a:lstStyle/>
           <a:p>
             <a:pPr indent="0" marL="0">
@@ -6948,7 +7220,9 @@
           <a:ln/>
         </p:spPr>
         <p:txBody>
-          <a:bodyPr wrap="square" rtlCol="0" anchor="t"/>
+          <a:bodyPr wrap="square" rtlCol="0" anchor="t">
+            <a:normAutofit/>
+          </a:bodyPr>
           <a:lstStyle/>
           <a:p>
             <a:pPr indent="0" marL="0">
@@ -6987,7 +7261,9 @@
           <a:ln/>
         </p:spPr>
         <p:txBody>
-          <a:bodyPr wrap="square" rtlCol="0" anchor="t"/>
+          <a:bodyPr wrap="square" rtlCol="0" anchor="t">
+            <a:normAutofit/>
+          </a:bodyPr>
           <a:lstStyle/>
           <a:p>
             <a:pPr indent="0" marL="0">
@@ -7026,7 +7302,9 @@
           <a:ln/>
         </p:spPr>
         <p:txBody>
-          <a:bodyPr wrap="square" rtlCol="0" anchor="ctr"/>
+          <a:bodyPr wrap="square" rtlCol="0" anchor="ctr">
+            <a:normAutofit/>
+          </a:bodyPr>
           <a:lstStyle/>
           <a:p>
             <a:pPr algn="r" indent="0" marL="0">

--- a/pptx_sessions_8_22/第11回_基礎編_受講者用.pptx
+++ b/pptx_sessions_8_22/第11回_基礎編_受講者用.pptx
@@ -1531,9 +1531,7 @@
           </a:ln>
         </p:spPr>
         <p:txBody>
-          <a:bodyPr wrap="square">
-            <a:normAutofit/>
-          </a:bodyPr>
+          <a:bodyPr/>
           <a:p/>
         </p:txBody>
       </p:sp>
@@ -1562,9 +1560,7 @@
           </a:ln>
         </p:spPr>
         <p:txBody>
-          <a:bodyPr wrap="square">
-            <a:normAutofit/>
-          </a:bodyPr>
+          <a:bodyPr/>
           <a:p/>
         </p:txBody>
       </p:sp>
@@ -1586,9 +1582,7 @@
           <a:ln/>
         </p:spPr>
         <p:txBody>
-          <a:bodyPr wrap="square" rtlCol="0" anchor="ctr">
-            <a:normAutofit/>
-          </a:bodyPr>
+          <a:bodyPr wrap="square" rtlCol="0" anchor="ctr"/>
           <a:lstStyle/>
           <a:p>
             <a:pPr algn="ctr" indent="0" marL="0">
@@ -1627,9 +1621,7 @@
           <a:ln/>
         </p:spPr>
         <p:txBody>
-          <a:bodyPr wrap="square" rtlCol="0" anchor="ctr">
-            <a:normAutofit/>
-          </a:bodyPr>
+          <a:bodyPr wrap="square" rtlCol="0" anchor="ctr"/>
           <a:lstStyle/>
           <a:p>
             <a:pPr algn="ctr" indent="0" marL="0">
@@ -1668,9 +1660,7 @@
           <a:ln/>
         </p:spPr>
         <p:txBody>
-          <a:bodyPr wrap="square" rtlCol="0" anchor="ctr">
-            <a:normAutofit/>
-          </a:bodyPr>
+          <a:bodyPr wrap="square" rtlCol="0" anchor="ctr"/>
           <a:lstStyle/>
           <a:p>
             <a:pPr algn="ctr" indent="0" marL="0">
@@ -1709,9 +1699,7 @@
           <a:ln/>
         </p:spPr>
         <p:txBody>
-          <a:bodyPr wrap="square" rtlCol="0" anchor="ctr">
-            <a:normAutofit/>
-          </a:bodyPr>
+          <a:bodyPr wrap="square" rtlCol="0" anchor="ctr"/>
           <a:lstStyle/>
           <a:p>
             <a:pPr algn="ctr" indent="0" marL="0">
@@ -1759,9 +1747,7 @@
           </a:ln>
         </p:spPr>
         <p:txBody>
-          <a:bodyPr wrap="square">
-            <a:normAutofit/>
-          </a:bodyPr>
+          <a:bodyPr/>
           <a:p/>
         </p:txBody>
       </p:sp>
@@ -1783,9 +1769,7 @@
           <a:ln/>
         </p:spPr>
         <p:txBody>
-          <a:bodyPr wrap="square" rtlCol="0" anchor="ctr">
-            <a:normAutofit/>
-          </a:bodyPr>
+          <a:bodyPr wrap="square" rtlCol="0" anchor="ctr"/>
           <a:lstStyle/>
           <a:p>
             <a:pPr algn="ctr" indent="0" marL="0">
@@ -1856,9 +1840,7 @@
           </a:ln>
         </p:spPr>
         <p:txBody>
-          <a:bodyPr wrap="square">
-            <a:normAutofit/>
-          </a:bodyPr>
+          <a:bodyPr/>
           <a:p/>
         </p:txBody>
       </p:sp>
@@ -1887,9 +1869,7 @@
           </a:ln>
         </p:spPr>
         <p:txBody>
-          <a:bodyPr wrap="square">
-            <a:normAutofit/>
-          </a:bodyPr>
+          <a:bodyPr/>
           <a:p/>
         </p:txBody>
       </p:sp>
@@ -1911,9 +1891,7 @@
           <a:ln/>
         </p:spPr>
         <p:txBody>
-          <a:bodyPr wrap="square" rtlCol="0" anchor="ctr">
-            <a:normAutofit/>
-          </a:bodyPr>
+          <a:bodyPr wrap="square" rtlCol="0" anchor="ctr"/>
           <a:lstStyle/>
           <a:p>
             <a:pPr indent="0" marL="0">
@@ -1952,9 +1930,7 @@
           <a:ln/>
         </p:spPr>
         <p:txBody>
-          <a:bodyPr wrap="square" rtlCol="0" anchor="ctr">
-            <a:normAutofit/>
-          </a:bodyPr>
+          <a:bodyPr wrap="square" rtlCol="0" anchor="ctr"/>
           <a:lstStyle/>
           <a:p>
             <a:pPr indent="0" marL="0">
@@ -2002,9 +1978,7 @@
           </a:ln>
         </p:spPr>
         <p:txBody>
-          <a:bodyPr wrap="square">
-            <a:normAutofit/>
-          </a:bodyPr>
+          <a:bodyPr/>
           <a:p/>
         </p:txBody>
       </p:sp>
@@ -2026,9 +2000,7 @@
           <a:ln/>
         </p:spPr>
         <p:txBody>
-          <a:bodyPr wrap="square" rtlCol="0" anchor="ctr">
-            <a:normAutofit/>
-          </a:bodyPr>
+          <a:bodyPr wrap="square" rtlCol="0" anchor="ctr"/>
           <a:lstStyle/>
           <a:p>
             <a:pPr indent="0" marL="0">
@@ -2067,9 +2039,7 @@
           <a:ln/>
         </p:spPr>
         <p:txBody>
-          <a:bodyPr wrap="square" rtlCol="0" anchor="ctr">
-            <a:normAutofit/>
-          </a:bodyPr>
+          <a:bodyPr wrap="square" rtlCol="0" anchor="ctr"/>
           <a:lstStyle/>
           <a:p>
             <a:pPr indent="0" marL="0">
@@ -2108,9 +2078,7 @@
           <a:ln/>
         </p:spPr>
         <p:txBody>
-          <a:bodyPr wrap="square" rtlCol="0" anchor="ctr">
-            <a:normAutofit/>
-          </a:bodyPr>
+          <a:bodyPr wrap="square" rtlCol="0" anchor="ctr"/>
           <a:lstStyle/>
           <a:p>
             <a:pPr indent="0" marL="0">
@@ -2158,9 +2126,7 @@
           </a:ln>
         </p:spPr>
         <p:txBody>
-          <a:bodyPr wrap="square">
-            <a:normAutofit/>
-          </a:bodyPr>
+          <a:bodyPr/>
           <a:p/>
         </p:txBody>
       </p:sp>
@@ -2182,9 +2148,7 @@
           <a:ln/>
         </p:spPr>
         <p:txBody>
-          <a:bodyPr wrap="square" rtlCol="0" anchor="ctr">
-            <a:normAutofit/>
-          </a:bodyPr>
+          <a:bodyPr wrap="square" rtlCol="0" anchor="ctr"/>
           <a:lstStyle/>
           <a:p>
             <a:pPr indent="0" marL="0">
@@ -2223,9 +2187,7 @@
           <a:ln/>
         </p:spPr>
         <p:txBody>
-          <a:bodyPr wrap="square" rtlCol="0" anchor="ctr">
-            <a:normAutofit/>
-          </a:bodyPr>
+          <a:bodyPr wrap="square" rtlCol="0" anchor="ctr"/>
           <a:lstStyle/>
           <a:p>
             <a:pPr indent="0" marL="0">
@@ -2264,9 +2226,7 @@
           <a:ln/>
         </p:spPr>
         <p:txBody>
-          <a:bodyPr wrap="square" rtlCol="0" anchor="ctr">
-            <a:normAutofit/>
-          </a:bodyPr>
+          <a:bodyPr wrap="square" rtlCol="0" anchor="ctr"/>
           <a:lstStyle/>
           <a:p>
             <a:pPr indent="0" marL="0">
@@ -2314,9 +2274,7 @@
           </a:ln>
         </p:spPr>
         <p:txBody>
-          <a:bodyPr wrap="square">
-            <a:normAutofit/>
-          </a:bodyPr>
+          <a:bodyPr/>
           <a:p/>
         </p:txBody>
       </p:sp>
@@ -2338,9 +2296,7 @@
           <a:ln/>
         </p:spPr>
         <p:txBody>
-          <a:bodyPr wrap="square" rtlCol="0" anchor="ctr">
-            <a:normAutofit/>
-          </a:bodyPr>
+          <a:bodyPr wrap="square" rtlCol="0" anchor="ctr"/>
           <a:lstStyle/>
           <a:p>
             <a:pPr indent="0" marL="0">
@@ -2379,9 +2335,7 @@
           <a:ln/>
         </p:spPr>
         <p:txBody>
-          <a:bodyPr wrap="square" rtlCol="0" anchor="ctr">
-            <a:normAutofit/>
-          </a:bodyPr>
+          <a:bodyPr wrap="square" rtlCol="0" anchor="ctr"/>
           <a:lstStyle/>
           <a:p>
             <a:pPr indent="0" marL="0">
@@ -2420,9 +2374,7 @@
           <a:ln/>
         </p:spPr>
         <p:txBody>
-          <a:bodyPr wrap="square" rtlCol="0" anchor="ctr">
-            <a:normAutofit/>
-          </a:bodyPr>
+          <a:bodyPr wrap="square" rtlCol="0" anchor="ctr"/>
           <a:lstStyle/>
           <a:p>
             <a:pPr indent="0" marL="0">
@@ -2461,9 +2413,7 @@
           <a:ln/>
         </p:spPr>
         <p:txBody>
-          <a:bodyPr wrap="square" rtlCol="0" anchor="ctr">
-            <a:normAutofit/>
-          </a:bodyPr>
+          <a:bodyPr wrap="square" rtlCol="0" anchor="ctr"/>
           <a:lstStyle/>
           <a:p>
             <a:pPr algn="r" indent="0" marL="0">
@@ -2534,9 +2484,7 @@
           </a:ln>
         </p:spPr>
         <p:txBody>
-          <a:bodyPr wrap="square">
-            <a:normAutofit/>
-          </a:bodyPr>
+          <a:bodyPr/>
           <a:p/>
         </p:txBody>
       </p:sp>
@@ -2565,9 +2513,7 @@
           </a:ln>
         </p:spPr>
         <p:txBody>
-          <a:bodyPr wrap="square">
-            <a:normAutofit/>
-          </a:bodyPr>
+          <a:bodyPr/>
           <a:p/>
         </p:txBody>
       </p:sp>
@@ -2589,9 +2535,7 @@
           <a:ln/>
         </p:spPr>
         <p:txBody>
-          <a:bodyPr wrap="square" rtlCol="0" anchor="ctr">
-            <a:normAutofit/>
-          </a:bodyPr>
+          <a:bodyPr wrap="square" rtlCol="0" anchor="ctr"/>
           <a:lstStyle/>
           <a:p>
             <a:pPr indent="0" marL="0">
@@ -2630,9 +2574,7 @@
           <a:ln/>
         </p:spPr>
         <p:txBody>
-          <a:bodyPr wrap="square" rtlCol="0" anchor="ctr">
-            <a:normAutofit/>
-          </a:bodyPr>
+          <a:bodyPr wrap="square" rtlCol="0" anchor="ctr"/>
           <a:lstStyle/>
           <a:p>
             <a:pPr indent="0" marL="0">
@@ -2678,9 +2620,7 @@
           </a:ln>
         </p:spPr>
         <p:txBody>
-          <a:bodyPr wrap="square">
-            <a:normAutofit/>
-          </a:bodyPr>
+          <a:bodyPr/>
           <a:p/>
         </p:txBody>
       </p:sp>
@@ -2711,9 +2651,7 @@
           </a:ln>
         </p:spPr>
         <p:txBody>
-          <a:bodyPr wrap="square">
-            <a:normAutofit/>
-          </a:bodyPr>
+          <a:bodyPr/>
           <a:p/>
         </p:txBody>
       </p:sp>
@@ -2735,9 +2673,7 @@
           <a:ln/>
         </p:spPr>
         <p:txBody>
-          <a:bodyPr wrap="square" rtlCol="0" anchor="ctr">
-            <a:normAutofit/>
-          </a:bodyPr>
+          <a:bodyPr wrap="square" rtlCol="0" anchor="ctr"/>
           <a:lstStyle/>
           <a:p>
             <a:pPr algn="ctr" indent="0" marL="0">
@@ -2776,9 +2712,7 @@
           <a:ln/>
         </p:spPr>
         <p:txBody>
-          <a:bodyPr wrap="square" rtlCol="0" anchor="ctr">
-            <a:normAutofit/>
-          </a:bodyPr>
+          <a:bodyPr wrap="square" rtlCol="0" anchor="ctr"/>
           <a:lstStyle/>
           <a:p>
             <a:pPr indent="0" marL="0">
@@ -2824,9 +2758,7 @@
           </a:ln>
         </p:spPr>
         <p:txBody>
-          <a:bodyPr wrap="square">
-            <a:normAutofit/>
-          </a:bodyPr>
+          <a:bodyPr/>
           <a:p/>
         </p:txBody>
       </p:sp>
@@ -2857,9 +2789,7 @@
           </a:ln>
         </p:spPr>
         <p:txBody>
-          <a:bodyPr wrap="square">
-            <a:normAutofit/>
-          </a:bodyPr>
+          <a:bodyPr/>
           <a:p/>
         </p:txBody>
       </p:sp>
@@ -2881,9 +2811,7 @@
           <a:ln/>
         </p:spPr>
         <p:txBody>
-          <a:bodyPr wrap="square" rtlCol="0" anchor="ctr">
-            <a:normAutofit/>
-          </a:bodyPr>
+          <a:bodyPr wrap="square" rtlCol="0" anchor="ctr"/>
           <a:lstStyle/>
           <a:p>
             <a:pPr algn="ctr" indent="0" marL="0">
@@ -2922,9 +2850,7 @@
           <a:ln/>
         </p:spPr>
         <p:txBody>
-          <a:bodyPr wrap="square" rtlCol="0" anchor="ctr">
-            <a:normAutofit/>
-          </a:bodyPr>
+          <a:bodyPr wrap="square" rtlCol="0" anchor="ctr"/>
           <a:lstStyle/>
           <a:p>
             <a:pPr indent="0" marL="0">
@@ -2963,9 +2889,7 @@
           <a:ln/>
         </p:spPr>
         <p:txBody>
-          <a:bodyPr wrap="square" rtlCol="0" anchor="ctr">
-            <a:normAutofit/>
-          </a:bodyPr>
+          <a:bodyPr wrap="square" rtlCol="0" anchor="ctr"/>
           <a:lstStyle/>
           <a:p>
             <a:pPr indent="0" marL="0">
@@ -3013,9 +2937,7 @@
           </a:ln>
         </p:spPr>
         <p:txBody>
-          <a:bodyPr wrap="square">
-            <a:normAutofit/>
-          </a:bodyPr>
+          <a:bodyPr/>
           <a:p/>
         </p:txBody>
       </p:sp>
@@ -3046,9 +2968,7 @@
           </a:ln>
         </p:spPr>
         <p:txBody>
-          <a:bodyPr wrap="square">
-            <a:normAutofit/>
-          </a:bodyPr>
+          <a:bodyPr/>
           <a:p/>
         </p:txBody>
       </p:sp>
@@ -3070,9 +2990,7 @@
           <a:ln/>
         </p:spPr>
         <p:txBody>
-          <a:bodyPr wrap="square" rtlCol="0" anchor="ctr">
-            <a:normAutofit/>
-          </a:bodyPr>
+          <a:bodyPr wrap="square" rtlCol="0" anchor="ctr"/>
           <a:lstStyle/>
           <a:p>
             <a:pPr algn="ctr" indent="0" marL="0">
@@ -3111,9 +3029,7 @@
           <a:ln/>
         </p:spPr>
         <p:txBody>
-          <a:bodyPr wrap="square" rtlCol="0" anchor="ctr">
-            <a:normAutofit/>
-          </a:bodyPr>
+          <a:bodyPr wrap="square" rtlCol="0" anchor="ctr"/>
           <a:lstStyle/>
           <a:p>
             <a:pPr indent="0" marL="0">
@@ -3161,9 +3077,7 @@
           </a:ln>
         </p:spPr>
         <p:txBody>
-          <a:bodyPr wrap="square">
-            <a:normAutofit/>
-          </a:bodyPr>
+          <a:bodyPr/>
           <a:p/>
         </p:txBody>
       </p:sp>
@@ -3194,9 +3108,7 @@
           </a:ln>
         </p:spPr>
         <p:txBody>
-          <a:bodyPr wrap="square">
-            <a:normAutofit/>
-          </a:bodyPr>
+          <a:bodyPr/>
           <a:p/>
         </p:txBody>
       </p:sp>
@@ -3218,9 +3130,7 @@
           <a:ln/>
         </p:spPr>
         <p:txBody>
-          <a:bodyPr wrap="square" rtlCol="0" anchor="ctr">
-            <a:normAutofit/>
-          </a:bodyPr>
+          <a:bodyPr wrap="square" rtlCol="0" anchor="ctr"/>
           <a:lstStyle/>
           <a:p>
             <a:pPr algn="ctr" indent="0" marL="0">
@@ -3259,9 +3169,7 @@
           <a:ln/>
         </p:spPr>
         <p:txBody>
-          <a:bodyPr wrap="square" rtlCol="0" anchor="ctr">
-            <a:normAutofit/>
-          </a:bodyPr>
+          <a:bodyPr wrap="square" rtlCol="0" anchor="ctr"/>
           <a:lstStyle/>
           <a:p>
             <a:pPr indent="0" marL="0">
@@ -3309,9 +3217,7 @@
           </a:ln>
         </p:spPr>
         <p:txBody>
-          <a:bodyPr wrap="square">
-            <a:normAutofit/>
-          </a:bodyPr>
+          <a:bodyPr/>
           <a:p/>
         </p:txBody>
       </p:sp>
@@ -3342,9 +3248,7 @@
           </a:ln>
         </p:spPr>
         <p:txBody>
-          <a:bodyPr wrap="square">
-            <a:normAutofit/>
-          </a:bodyPr>
+          <a:bodyPr/>
           <a:p/>
         </p:txBody>
       </p:sp>
@@ -3366,9 +3270,7 @@
           <a:ln/>
         </p:spPr>
         <p:txBody>
-          <a:bodyPr wrap="square" rtlCol="0" anchor="ctr">
-            <a:normAutofit/>
-          </a:bodyPr>
+          <a:bodyPr wrap="square" rtlCol="0" anchor="ctr"/>
           <a:lstStyle/>
           <a:p>
             <a:pPr algn="ctr" indent="0" marL="0">
@@ -3407,9 +3309,7 @@
           <a:ln/>
         </p:spPr>
         <p:txBody>
-          <a:bodyPr wrap="square" rtlCol="0" anchor="ctr">
-            <a:normAutofit/>
-          </a:bodyPr>
+          <a:bodyPr wrap="square" rtlCol="0" anchor="ctr"/>
           <a:lstStyle/>
           <a:p>
             <a:pPr indent="0" marL="0">
@@ -3457,9 +3357,7 @@
           </a:ln>
         </p:spPr>
         <p:txBody>
-          <a:bodyPr wrap="square">
-            <a:normAutofit/>
-          </a:bodyPr>
+          <a:bodyPr/>
           <a:p/>
         </p:txBody>
       </p:sp>
@@ -3490,9 +3388,7 @@
           </a:ln>
         </p:spPr>
         <p:txBody>
-          <a:bodyPr wrap="square">
-            <a:normAutofit/>
-          </a:bodyPr>
+          <a:bodyPr/>
           <a:p/>
         </p:txBody>
       </p:sp>
@@ -3514,9 +3410,7 @@
           <a:ln/>
         </p:spPr>
         <p:txBody>
-          <a:bodyPr wrap="square" rtlCol="0" anchor="ctr">
-            <a:normAutofit/>
-          </a:bodyPr>
+          <a:bodyPr wrap="square" rtlCol="0" anchor="ctr"/>
           <a:lstStyle/>
           <a:p>
             <a:pPr algn="ctr" indent="0" marL="0">
@@ -3555,9 +3449,7 @@
           <a:ln/>
         </p:spPr>
         <p:txBody>
-          <a:bodyPr wrap="square" rtlCol="0" anchor="ctr">
-            <a:normAutofit/>
-          </a:bodyPr>
+          <a:bodyPr wrap="square" rtlCol="0" anchor="ctr"/>
           <a:lstStyle/>
           <a:p>
             <a:pPr indent="0" marL="0">
@@ -3605,9 +3497,7 @@
           </a:ln>
         </p:spPr>
         <p:txBody>
-          <a:bodyPr wrap="square">
-            <a:normAutofit/>
-          </a:bodyPr>
+          <a:bodyPr/>
           <a:p/>
         </p:txBody>
       </p:sp>
@@ -3638,9 +3528,7 @@
           </a:ln>
         </p:spPr>
         <p:txBody>
-          <a:bodyPr wrap="square">
-            <a:normAutofit/>
-          </a:bodyPr>
+          <a:bodyPr/>
           <a:p/>
         </p:txBody>
       </p:sp>
@@ -3662,9 +3550,7 @@
           <a:ln/>
         </p:spPr>
         <p:txBody>
-          <a:bodyPr wrap="square" rtlCol="0" anchor="ctr">
-            <a:normAutofit/>
-          </a:bodyPr>
+          <a:bodyPr wrap="square" rtlCol="0" anchor="ctr"/>
           <a:lstStyle/>
           <a:p>
             <a:pPr algn="ctr" indent="0" marL="0">
@@ -3703,9 +3589,7 @@
           <a:ln/>
         </p:spPr>
         <p:txBody>
-          <a:bodyPr wrap="square" rtlCol="0" anchor="ctr">
-            <a:normAutofit/>
-          </a:bodyPr>
+          <a:bodyPr wrap="square" rtlCol="0" anchor="ctr"/>
           <a:lstStyle/>
           <a:p>
             <a:pPr indent="0" marL="0">
@@ -3744,9 +3628,7 @@
           <a:ln/>
         </p:spPr>
         <p:txBody>
-          <a:bodyPr wrap="square" rtlCol="0" anchor="ctr">
-            <a:normAutofit/>
-          </a:bodyPr>
+          <a:bodyPr wrap="square" rtlCol="0" anchor="ctr"/>
           <a:lstStyle/>
           <a:p>
             <a:pPr algn="r" indent="0" marL="0">
@@ -3817,9 +3699,7 @@
           </a:ln>
         </p:spPr>
         <p:txBody>
-          <a:bodyPr wrap="square">
-            <a:normAutofit/>
-          </a:bodyPr>
+          <a:bodyPr/>
           <a:p/>
         </p:txBody>
       </p:sp>
@@ -3848,9 +3728,7 @@
           </a:ln>
         </p:spPr>
         <p:txBody>
-          <a:bodyPr wrap="square">
-            <a:normAutofit/>
-          </a:bodyPr>
+          <a:bodyPr/>
           <a:p/>
         </p:txBody>
       </p:sp>
@@ -3881,9 +3759,7 @@
           </a:ln>
         </p:spPr>
         <p:txBody>
-          <a:bodyPr wrap="square">
-            <a:normAutofit/>
-          </a:bodyPr>
+          <a:bodyPr/>
           <a:p/>
         </p:txBody>
       </p:sp>
@@ -3905,9 +3781,7 @@
           <a:ln/>
         </p:spPr>
         <p:txBody>
-          <a:bodyPr wrap="square" rtlCol="0" anchor="ctr">
-            <a:normAutofit/>
-          </a:bodyPr>
+          <a:bodyPr wrap="square" rtlCol="0" anchor="ctr"/>
           <a:lstStyle/>
           <a:p>
             <a:pPr algn="ctr" indent="0" marL="0">
@@ -3946,9 +3820,7 @@
           <a:ln/>
         </p:spPr>
         <p:txBody>
-          <a:bodyPr wrap="square" rtlCol="0" anchor="ctr">
-            <a:normAutofit/>
-          </a:bodyPr>
+          <a:bodyPr wrap="square" rtlCol="0" anchor="ctr"/>
           <a:lstStyle/>
           <a:p>
             <a:pPr indent="0" marL="0">
@@ -3987,9 +3859,7 @@
           <a:ln/>
         </p:spPr>
         <p:txBody>
-          <a:bodyPr wrap="square" rtlCol="0" anchor="ctr">
-            <a:normAutofit/>
-          </a:bodyPr>
+          <a:bodyPr wrap="square" rtlCol="0" anchor="ctr"/>
           <a:lstStyle/>
           <a:p>
             <a:pPr indent="0" marL="0">
@@ -4037,9 +3907,7 @@
           </a:ln>
         </p:spPr>
         <p:txBody>
-          <a:bodyPr wrap="square">
-            <a:normAutofit/>
-          </a:bodyPr>
+          <a:bodyPr/>
           <a:p/>
         </p:txBody>
       </p:sp>
@@ -4061,9 +3929,7 @@
           <a:ln/>
         </p:spPr>
         <p:txBody>
-          <a:bodyPr wrap="square" rtlCol="0" anchor="ctr">
-            <a:normAutofit/>
-          </a:bodyPr>
+          <a:bodyPr wrap="square" rtlCol="0" anchor="ctr"/>
           <a:lstStyle/>
           <a:p>
             <a:pPr indent="0" marL="0">
@@ -4102,9 +3968,7 @@
           <a:ln/>
         </p:spPr>
         <p:txBody>
-          <a:bodyPr wrap="square" rtlCol="0" anchor="t">
-            <a:normAutofit/>
-          </a:bodyPr>
+          <a:bodyPr wrap="square" rtlCol="0" anchor="t"/>
           <a:lstStyle/>
           <a:p>
             <a:pPr indent="0" marL="0">
@@ -4262,9 +4126,7 @@
           <a:ln/>
         </p:spPr>
         <p:txBody>
-          <a:bodyPr wrap="square" rtlCol="0" anchor="ctr">
-            <a:normAutofit/>
-          </a:bodyPr>
+          <a:bodyPr wrap="square" rtlCol="0" anchor="ctr"/>
           <a:lstStyle/>
           <a:p>
             <a:pPr algn="r" indent="0" marL="0">
@@ -4335,9 +4197,7 @@
           </a:ln>
         </p:spPr>
         <p:txBody>
-          <a:bodyPr wrap="square">
-            <a:normAutofit/>
-          </a:bodyPr>
+          <a:bodyPr/>
           <a:p/>
         </p:txBody>
       </p:sp>
@@ -4366,9 +4226,7 @@
           </a:ln>
         </p:spPr>
         <p:txBody>
-          <a:bodyPr wrap="square">
-            <a:normAutofit/>
-          </a:bodyPr>
+          <a:bodyPr/>
           <a:p/>
         </p:txBody>
       </p:sp>
@@ -4399,9 +4257,7 @@
           </a:ln>
         </p:spPr>
         <p:txBody>
-          <a:bodyPr wrap="square">
-            <a:normAutofit/>
-          </a:bodyPr>
+          <a:bodyPr/>
           <a:p/>
         </p:txBody>
       </p:sp>
@@ -4423,9 +4279,7 @@
           <a:ln/>
         </p:spPr>
         <p:txBody>
-          <a:bodyPr wrap="square" rtlCol="0" anchor="ctr">
-            <a:normAutofit/>
-          </a:bodyPr>
+          <a:bodyPr wrap="square" rtlCol="0" anchor="ctr"/>
           <a:lstStyle/>
           <a:p>
             <a:pPr algn="ctr" indent="0" marL="0">
@@ -4464,9 +4318,7 @@
           <a:ln/>
         </p:spPr>
         <p:txBody>
-          <a:bodyPr wrap="square" rtlCol="0" anchor="ctr">
-            <a:normAutofit/>
-          </a:bodyPr>
+          <a:bodyPr wrap="square" rtlCol="0" anchor="ctr"/>
           <a:lstStyle/>
           <a:p>
             <a:pPr indent="0" marL="0">
@@ -4505,9 +4357,7 @@
           <a:ln/>
         </p:spPr>
         <p:txBody>
-          <a:bodyPr wrap="square" rtlCol="0" anchor="ctr">
-            <a:normAutofit/>
-          </a:bodyPr>
+          <a:bodyPr wrap="square" rtlCol="0" anchor="ctr"/>
           <a:lstStyle/>
           <a:p>
             <a:pPr indent="0" marL="0">
@@ -4555,9 +4405,7 @@
           </a:ln>
         </p:spPr>
         <p:txBody>
-          <a:bodyPr wrap="square">
-            <a:normAutofit/>
-          </a:bodyPr>
+          <a:bodyPr/>
           <a:p/>
         </p:txBody>
       </p:sp>
@@ -4579,9 +4427,7 @@
           <a:ln/>
         </p:spPr>
         <p:txBody>
-          <a:bodyPr wrap="square" rtlCol="0" anchor="ctr">
-            <a:normAutofit/>
-          </a:bodyPr>
+          <a:bodyPr wrap="square" rtlCol="0" anchor="ctr"/>
           <a:lstStyle/>
           <a:p>
             <a:pPr indent="0" marL="0">
@@ -4620,9 +4466,7 @@
           <a:ln/>
         </p:spPr>
         <p:txBody>
-          <a:bodyPr wrap="square" rtlCol="0" anchor="ctr">
-            <a:normAutofit/>
-          </a:bodyPr>
+          <a:bodyPr wrap="square" rtlCol="0" anchor="ctr"/>
           <a:lstStyle/>
           <a:p>
             <a:pPr indent="0" marL="0">
@@ -4661,9 +4505,7 @@
           <a:ln/>
         </p:spPr>
         <p:txBody>
-          <a:bodyPr wrap="square" rtlCol="0" anchor="t">
-            <a:normAutofit/>
-          </a:bodyPr>
+          <a:bodyPr wrap="square" rtlCol="0" anchor="t"/>
           <a:lstStyle/>
           <a:p>
             <a:pPr indent="0" marL="0">
@@ -4702,9 +4544,7 @@
           <a:ln/>
         </p:spPr>
         <p:txBody>
-          <a:bodyPr wrap="square" rtlCol="0" anchor="ctr">
-            <a:normAutofit/>
-          </a:bodyPr>
+          <a:bodyPr wrap="square" rtlCol="0" anchor="ctr"/>
           <a:lstStyle/>
           <a:p>
             <a:pPr indent="0" marL="0">
@@ -4743,9 +4583,7 @@
           <a:ln/>
         </p:spPr>
         <p:txBody>
-          <a:bodyPr wrap="square" rtlCol="0" anchor="t">
-            <a:normAutofit/>
-          </a:bodyPr>
+          <a:bodyPr wrap="square" rtlCol="0" anchor="t"/>
           <a:lstStyle/>
           <a:p>
             <a:pPr indent="0" marL="0">
@@ -4784,9 +4622,7 @@
           <a:ln/>
         </p:spPr>
         <p:txBody>
-          <a:bodyPr wrap="square" rtlCol="0" anchor="ctr">
-            <a:normAutofit/>
-          </a:bodyPr>
+          <a:bodyPr wrap="square" rtlCol="0" anchor="ctr"/>
           <a:lstStyle/>
           <a:p>
             <a:pPr indent="0" marL="0">
@@ -4825,9 +4661,7 @@
           <a:ln/>
         </p:spPr>
         <p:txBody>
-          <a:bodyPr wrap="square" rtlCol="0" anchor="t">
-            <a:normAutofit/>
-          </a:bodyPr>
+          <a:bodyPr wrap="square" rtlCol="0" anchor="t"/>
           <a:lstStyle/>
           <a:p>
             <a:pPr indent="0" marL="0">
@@ -4875,9 +4709,7 @@
           </a:ln>
         </p:spPr>
         <p:txBody>
-          <a:bodyPr wrap="square">
-            <a:normAutofit/>
-          </a:bodyPr>
+          <a:bodyPr/>
           <a:p/>
         </p:txBody>
       </p:sp>
@@ -4899,9 +4731,7 @@
           <a:ln/>
         </p:spPr>
         <p:txBody>
-          <a:bodyPr wrap="square" rtlCol="0" anchor="ctr">
-            <a:normAutofit/>
-          </a:bodyPr>
+          <a:bodyPr wrap="square" rtlCol="0" anchor="ctr"/>
           <a:lstStyle/>
           <a:p>
             <a:pPr indent="0" marL="0">
@@ -4940,9 +4770,7 @@
           <a:ln/>
         </p:spPr>
         <p:txBody>
-          <a:bodyPr wrap="square" rtlCol="0" anchor="t">
-            <a:normAutofit/>
-          </a:bodyPr>
+          <a:bodyPr wrap="square" rtlCol="0" anchor="t"/>
           <a:lstStyle/>
           <a:p>
             <a:pPr indent="0" marL="0">
@@ -4981,9 +4809,7 @@
           <a:ln/>
         </p:spPr>
         <p:txBody>
-          <a:bodyPr wrap="square" rtlCol="0" anchor="t">
-            <a:normAutofit/>
-          </a:bodyPr>
+          <a:bodyPr wrap="square" rtlCol="0" anchor="t"/>
           <a:lstStyle/>
           <a:p>
             <a:pPr indent="0" marL="0">
@@ -5022,9 +4848,7 @@
           <a:ln/>
         </p:spPr>
         <p:txBody>
-          <a:bodyPr wrap="square" rtlCol="0" anchor="t">
-            <a:normAutofit/>
-          </a:bodyPr>
+          <a:bodyPr wrap="square" rtlCol="0" anchor="t"/>
           <a:lstStyle/>
           <a:p>
             <a:pPr indent="0" marL="0">
@@ -5063,9 +4887,7 @@
           <a:ln/>
         </p:spPr>
         <p:txBody>
-          <a:bodyPr wrap="square" rtlCol="0" anchor="ctr">
-            <a:normAutofit/>
-          </a:bodyPr>
+          <a:bodyPr wrap="square" rtlCol="0" anchor="ctr"/>
           <a:lstStyle/>
           <a:p>
             <a:pPr algn="r" indent="0" marL="0">
@@ -5136,9 +4958,7 @@
           </a:ln>
         </p:spPr>
         <p:txBody>
-          <a:bodyPr wrap="square">
-            <a:normAutofit/>
-          </a:bodyPr>
+          <a:bodyPr/>
           <a:p/>
         </p:txBody>
       </p:sp>
@@ -5167,9 +4987,7 @@
           </a:ln>
         </p:spPr>
         <p:txBody>
-          <a:bodyPr wrap="square">
-            <a:normAutofit/>
-          </a:bodyPr>
+          <a:bodyPr/>
           <a:p/>
         </p:txBody>
       </p:sp>
@@ -5200,9 +5018,7 @@
           </a:ln>
         </p:spPr>
         <p:txBody>
-          <a:bodyPr wrap="square">
-            <a:normAutofit/>
-          </a:bodyPr>
+          <a:bodyPr/>
           <a:p/>
         </p:txBody>
       </p:sp>
@@ -5224,9 +5040,7 @@
           <a:ln/>
         </p:spPr>
         <p:txBody>
-          <a:bodyPr wrap="square" rtlCol="0" anchor="ctr">
-            <a:normAutofit/>
-          </a:bodyPr>
+          <a:bodyPr wrap="square" rtlCol="0" anchor="ctr"/>
           <a:lstStyle/>
           <a:p>
             <a:pPr algn="ctr" indent="0" marL="0">
@@ -5265,9 +5079,7 @@
           <a:ln/>
         </p:spPr>
         <p:txBody>
-          <a:bodyPr wrap="square" rtlCol="0" anchor="ctr">
-            <a:normAutofit/>
-          </a:bodyPr>
+          <a:bodyPr wrap="square" rtlCol="0" anchor="ctr"/>
           <a:lstStyle/>
           <a:p>
             <a:pPr indent="0" marL="0">
@@ -5306,9 +5118,7 @@
           <a:ln/>
         </p:spPr>
         <p:txBody>
-          <a:bodyPr wrap="square" rtlCol="0" anchor="ctr">
-            <a:normAutofit/>
-          </a:bodyPr>
+          <a:bodyPr wrap="square" rtlCol="0" anchor="ctr"/>
           <a:lstStyle/>
           <a:p>
             <a:pPr indent="0" marL="0">
@@ -5356,9 +5166,7 @@
           </a:ln>
         </p:spPr>
         <p:txBody>
-          <a:bodyPr wrap="square">
-            <a:normAutofit/>
-          </a:bodyPr>
+          <a:bodyPr/>
           <a:p/>
         </p:txBody>
       </p:sp>
@@ -5380,9 +5188,7 @@
           <a:ln/>
         </p:spPr>
         <p:txBody>
-          <a:bodyPr wrap="square" rtlCol="0" anchor="ctr">
-            <a:normAutofit/>
-          </a:bodyPr>
+          <a:bodyPr wrap="square" rtlCol="0" anchor="ctr"/>
           <a:lstStyle/>
           <a:p>
             <a:pPr indent="0" marL="0">
@@ -5421,9 +5227,7 @@
           <a:ln/>
         </p:spPr>
         <p:txBody>
-          <a:bodyPr wrap="square" rtlCol="0" anchor="t">
-            <a:normAutofit/>
-          </a:bodyPr>
+          <a:bodyPr wrap="square" rtlCol="0" anchor="t"/>
           <a:lstStyle/>
           <a:p>
             <a:pPr indent="0" marL="0">
@@ -5700,9 +5504,7 @@
           <a:ln/>
         </p:spPr>
         <p:txBody>
-          <a:bodyPr wrap="square" rtlCol="0" anchor="ctr">
-            <a:normAutofit/>
-          </a:bodyPr>
+          <a:bodyPr wrap="square" rtlCol="0" anchor="ctr"/>
           <a:lstStyle/>
           <a:p>
             <a:pPr algn="r" indent="0" marL="0">
@@ -5773,9 +5575,7 @@
           </a:ln>
         </p:spPr>
         <p:txBody>
-          <a:bodyPr wrap="square">
-            <a:normAutofit/>
-          </a:bodyPr>
+          <a:bodyPr/>
           <a:p/>
         </p:txBody>
       </p:sp>
@@ -5804,9 +5604,7 @@
           </a:ln>
         </p:spPr>
         <p:txBody>
-          <a:bodyPr wrap="square">
-            <a:normAutofit/>
-          </a:bodyPr>
+          <a:bodyPr/>
           <a:p/>
         </p:txBody>
       </p:sp>
@@ -5837,9 +5635,7 @@
           </a:ln>
         </p:spPr>
         <p:txBody>
-          <a:bodyPr wrap="square">
-            <a:normAutofit/>
-          </a:bodyPr>
+          <a:bodyPr/>
           <a:p/>
         </p:txBody>
       </p:sp>
@@ -5861,9 +5657,7 @@
           <a:ln/>
         </p:spPr>
         <p:txBody>
-          <a:bodyPr wrap="square" rtlCol="0" anchor="ctr">
-            <a:normAutofit/>
-          </a:bodyPr>
+          <a:bodyPr wrap="square" rtlCol="0" anchor="ctr"/>
           <a:lstStyle/>
           <a:p>
             <a:pPr algn="ctr" indent="0" marL="0">
@@ -5902,9 +5696,7 @@
           <a:ln/>
         </p:spPr>
         <p:txBody>
-          <a:bodyPr wrap="square" rtlCol="0" anchor="ctr">
-            <a:normAutofit/>
-          </a:bodyPr>
+          <a:bodyPr wrap="square" rtlCol="0" anchor="ctr"/>
           <a:lstStyle/>
           <a:p>
             <a:pPr indent="0" marL="0">
@@ -5943,9 +5735,7 @@
           <a:ln/>
         </p:spPr>
         <p:txBody>
-          <a:bodyPr wrap="square" rtlCol="0" anchor="ctr">
-            <a:normAutofit/>
-          </a:bodyPr>
+          <a:bodyPr wrap="square" rtlCol="0" anchor="ctr"/>
           <a:lstStyle/>
           <a:p>
             <a:pPr indent="0" marL="0">
@@ -5993,9 +5783,7 @@
           </a:ln>
         </p:spPr>
         <p:txBody>
-          <a:bodyPr wrap="square">
-            <a:normAutofit/>
-          </a:bodyPr>
+          <a:bodyPr/>
           <a:p/>
         </p:txBody>
       </p:sp>
@@ -6017,9 +5805,7 @@
           <a:ln/>
         </p:spPr>
         <p:txBody>
-          <a:bodyPr wrap="square" rtlCol="0" anchor="ctr">
-            <a:normAutofit/>
-          </a:bodyPr>
+          <a:bodyPr wrap="square" rtlCol="0" anchor="ctr"/>
           <a:lstStyle/>
           <a:p>
             <a:pPr indent="0" marL="0">
@@ -6058,9 +5844,7 @@
           <a:ln/>
         </p:spPr>
         <p:txBody>
-          <a:bodyPr wrap="square" rtlCol="0" anchor="ctr">
-            <a:normAutofit/>
-          </a:bodyPr>
+          <a:bodyPr wrap="square" rtlCol="0" anchor="ctr"/>
           <a:lstStyle/>
           <a:p>
             <a:pPr indent="0" marL="0">
@@ -6099,9 +5883,7 @@
           <a:ln/>
         </p:spPr>
         <p:txBody>
-          <a:bodyPr wrap="square" rtlCol="0" anchor="t">
-            <a:normAutofit/>
-          </a:bodyPr>
+          <a:bodyPr wrap="square" rtlCol="0" anchor="t"/>
           <a:lstStyle/>
           <a:p>
             <a:pPr indent="0" marL="0">
@@ -6140,9 +5922,7 @@
           <a:ln/>
         </p:spPr>
         <p:txBody>
-          <a:bodyPr wrap="square" rtlCol="0" anchor="ctr">
-            <a:normAutofit/>
-          </a:bodyPr>
+          <a:bodyPr wrap="square" rtlCol="0" anchor="ctr"/>
           <a:lstStyle/>
           <a:p>
             <a:pPr indent="0" marL="0">
@@ -6181,9 +5961,7 @@
           <a:ln/>
         </p:spPr>
         <p:txBody>
-          <a:bodyPr wrap="square" rtlCol="0" anchor="t">
-            <a:normAutofit/>
-          </a:bodyPr>
+          <a:bodyPr wrap="square" rtlCol="0" anchor="t"/>
           <a:lstStyle/>
           <a:p>
             <a:pPr indent="0" marL="0">
@@ -6222,9 +6000,7 @@
           <a:ln/>
         </p:spPr>
         <p:txBody>
-          <a:bodyPr wrap="square" rtlCol="0" anchor="ctr">
-            <a:normAutofit/>
-          </a:bodyPr>
+          <a:bodyPr wrap="square" rtlCol="0" anchor="ctr"/>
           <a:lstStyle/>
           <a:p>
             <a:pPr indent="0" marL="0">
@@ -6263,9 +6039,7 @@
           <a:ln/>
         </p:spPr>
         <p:txBody>
-          <a:bodyPr wrap="square" rtlCol="0" anchor="t">
-            <a:normAutofit/>
-          </a:bodyPr>
+          <a:bodyPr wrap="square" rtlCol="0" anchor="t"/>
           <a:lstStyle/>
           <a:p>
             <a:pPr indent="0" marL="0">
@@ -6313,9 +6087,7 @@
           </a:ln>
         </p:spPr>
         <p:txBody>
-          <a:bodyPr wrap="square">
-            <a:normAutofit/>
-          </a:bodyPr>
+          <a:bodyPr/>
           <a:p/>
         </p:txBody>
       </p:sp>
@@ -6337,9 +6109,7 @@
           <a:ln/>
         </p:spPr>
         <p:txBody>
-          <a:bodyPr wrap="square" rtlCol="0" anchor="ctr">
-            <a:normAutofit/>
-          </a:bodyPr>
+          <a:bodyPr wrap="square" rtlCol="0" anchor="ctr"/>
           <a:lstStyle/>
           <a:p>
             <a:pPr indent="0" marL="0">
@@ -6378,9 +6148,7 @@
           <a:ln/>
         </p:spPr>
         <p:txBody>
-          <a:bodyPr wrap="square" rtlCol="0" anchor="t">
-            <a:normAutofit/>
-          </a:bodyPr>
+          <a:bodyPr wrap="square" rtlCol="0" anchor="t"/>
           <a:lstStyle/>
           <a:p>
             <a:pPr indent="0" marL="0">
@@ -6419,9 +6187,7 @@
           <a:ln/>
         </p:spPr>
         <p:txBody>
-          <a:bodyPr wrap="square" rtlCol="0" anchor="t">
-            <a:normAutofit/>
-          </a:bodyPr>
+          <a:bodyPr wrap="square" rtlCol="0" anchor="t"/>
           <a:lstStyle/>
           <a:p>
             <a:pPr indent="0" marL="0">
@@ -6460,9 +6226,7 @@
           <a:ln/>
         </p:spPr>
         <p:txBody>
-          <a:bodyPr wrap="square" rtlCol="0" anchor="t">
-            <a:normAutofit/>
-          </a:bodyPr>
+          <a:bodyPr wrap="square" rtlCol="0" anchor="t"/>
           <a:lstStyle/>
           <a:p>
             <a:pPr indent="0" marL="0">
@@ -6501,9 +6265,7 @@
           <a:ln/>
         </p:spPr>
         <p:txBody>
-          <a:bodyPr wrap="square" rtlCol="0" anchor="ctr">
-            <a:normAutofit/>
-          </a:bodyPr>
+          <a:bodyPr wrap="square" rtlCol="0" anchor="ctr"/>
           <a:lstStyle/>
           <a:p>
             <a:pPr algn="r" indent="0" marL="0">
@@ -6574,9 +6336,7 @@
           </a:ln>
         </p:spPr>
         <p:txBody>
-          <a:bodyPr wrap="square">
-            <a:normAutofit/>
-          </a:bodyPr>
+          <a:bodyPr/>
           <a:p/>
         </p:txBody>
       </p:sp>
@@ -6605,9 +6365,7 @@
           </a:ln>
         </p:spPr>
         <p:txBody>
-          <a:bodyPr wrap="square">
-            <a:normAutofit/>
-          </a:bodyPr>
+          <a:bodyPr/>
           <a:p/>
         </p:txBody>
       </p:sp>
@@ -6638,9 +6396,7 @@
           </a:ln>
         </p:spPr>
         <p:txBody>
-          <a:bodyPr wrap="square">
-            <a:normAutofit/>
-          </a:bodyPr>
+          <a:bodyPr/>
           <a:p/>
         </p:txBody>
       </p:sp>
@@ -6662,9 +6418,7 @@
           <a:ln/>
         </p:spPr>
         <p:txBody>
-          <a:bodyPr wrap="square" rtlCol="0" anchor="ctr">
-            <a:normAutofit/>
-          </a:bodyPr>
+          <a:bodyPr wrap="square" rtlCol="0" anchor="ctr"/>
           <a:lstStyle/>
           <a:p>
             <a:pPr algn="ctr" indent="0" marL="0">
@@ -6703,9 +6457,7 @@
           <a:ln/>
         </p:spPr>
         <p:txBody>
-          <a:bodyPr wrap="square" rtlCol="0" anchor="ctr">
-            <a:normAutofit/>
-          </a:bodyPr>
+          <a:bodyPr wrap="square" rtlCol="0" anchor="ctr"/>
           <a:lstStyle/>
           <a:p>
             <a:pPr indent="0" marL="0">
@@ -6744,9 +6496,7 @@
           <a:ln/>
         </p:spPr>
         <p:txBody>
-          <a:bodyPr wrap="square" rtlCol="0" anchor="ctr">
-            <a:normAutofit/>
-          </a:bodyPr>
+          <a:bodyPr wrap="square" rtlCol="0" anchor="ctr"/>
           <a:lstStyle/>
           <a:p>
             <a:pPr indent="0" marL="0">
@@ -6794,9 +6544,7 @@
           </a:ln>
         </p:spPr>
         <p:txBody>
-          <a:bodyPr wrap="square">
-            <a:normAutofit/>
-          </a:bodyPr>
+          <a:bodyPr/>
           <a:p/>
         </p:txBody>
       </p:sp>
@@ -6818,9 +6566,7 @@
           <a:ln/>
         </p:spPr>
         <p:txBody>
-          <a:bodyPr wrap="square" rtlCol="0" anchor="ctr">
-            <a:normAutofit/>
-          </a:bodyPr>
+          <a:bodyPr wrap="square" rtlCol="0" anchor="ctr"/>
           <a:lstStyle/>
           <a:p>
             <a:pPr indent="0" marL="0">
@@ -6859,9 +6605,7 @@
           <a:ln/>
         </p:spPr>
         <p:txBody>
-          <a:bodyPr wrap="square" rtlCol="0" anchor="ctr">
-            <a:normAutofit/>
-          </a:bodyPr>
+          <a:bodyPr wrap="square" rtlCol="0" anchor="ctr"/>
           <a:lstStyle/>
           <a:p>
             <a:pPr indent="0" marL="0">
@@ -6900,9 +6644,7 @@
           <a:ln/>
         </p:spPr>
         <p:txBody>
-          <a:bodyPr wrap="square" rtlCol="0" anchor="t">
-            <a:normAutofit/>
-          </a:bodyPr>
+          <a:bodyPr wrap="square" rtlCol="0" anchor="t"/>
           <a:lstStyle/>
           <a:p>
             <a:pPr indent="0" marL="0">
@@ -6941,9 +6683,7 @@
           <a:ln/>
         </p:spPr>
         <p:txBody>
-          <a:bodyPr wrap="square" rtlCol="0" anchor="ctr">
-            <a:normAutofit/>
-          </a:bodyPr>
+          <a:bodyPr wrap="square" rtlCol="0" anchor="ctr"/>
           <a:lstStyle/>
           <a:p>
             <a:pPr indent="0" marL="0">
@@ -6982,9 +6722,7 @@
           <a:ln/>
         </p:spPr>
         <p:txBody>
-          <a:bodyPr wrap="square" rtlCol="0" anchor="t">
-            <a:normAutofit/>
-          </a:bodyPr>
+          <a:bodyPr wrap="square" rtlCol="0" anchor="t"/>
           <a:lstStyle/>
           <a:p>
             <a:pPr indent="0" marL="0">
@@ -7023,9 +6761,7 @@
           <a:ln/>
         </p:spPr>
         <p:txBody>
-          <a:bodyPr wrap="square" rtlCol="0" anchor="ctr">
-            <a:normAutofit/>
-          </a:bodyPr>
+          <a:bodyPr wrap="square" rtlCol="0" anchor="ctr"/>
           <a:lstStyle/>
           <a:p>
             <a:pPr indent="0" marL="0">
@@ -7064,9 +6800,7 @@
           <a:ln/>
         </p:spPr>
         <p:txBody>
-          <a:bodyPr wrap="square" rtlCol="0" anchor="t">
-            <a:normAutofit/>
-          </a:bodyPr>
+          <a:bodyPr wrap="square" rtlCol="0" anchor="t"/>
           <a:lstStyle/>
           <a:p>
             <a:pPr indent="0" marL="0">
@@ -7114,9 +6848,7 @@
           </a:ln>
         </p:spPr>
         <p:txBody>
-          <a:bodyPr wrap="square">
-            <a:normAutofit/>
-          </a:bodyPr>
+          <a:bodyPr/>
           <a:p/>
         </p:txBody>
       </p:sp>
@@ -7138,9 +6870,7 @@
           <a:ln/>
         </p:spPr>
         <p:txBody>
-          <a:bodyPr wrap="square" rtlCol="0" anchor="ctr">
-            <a:normAutofit/>
-          </a:bodyPr>
+          <a:bodyPr wrap="square" rtlCol="0" anchor="ctr"/>
           <a:lstStyle/>
           <a:p>
             <a:pPr indent="0" marL="0">
@@ -7179,9 +6909,7 @@
           <a:ln/>
         </p:spPr>
         <p:txBody>
-          <a:bodyPr wrap="square" rtlCol="0" anchor="t">
-            <a:normAutofit/>
-          </a:bodyPr>
+          <a:bodyPr wrap="square" rtlCol="0" anchor="t"/>
           <a:lstStyle/>
           <a:p>
             <a:pPr indent="0" marL="0">
@@ -7220,9 +6948,7 @@
           <a:ln/>
         </p:spPr>
         <p:txBody>
-          <a:bodyPr wrap="square" rtlCol="0" anchor="t">
-            <a:normAutofit/>
-          </a:bodyPr>
+          <a:bodyPr wrap="square" rtlCol="0" anchor="t"/>
           <a:lstStyle/>
           <a:p>
             <a:pPr indent="0" marL="0">
@@ -7261,9 +6987,7 @@
           <a:ln/>
         </p:spPr>
         <p:txBody>
-          <a:bodyPr wrap="square" rtlCol="0" anchor="t">
-            <a:normAutofit/>
-          </a:bodyPr>
+          <a:bodyPr wrap="square" rtlCol="0" anchor="t"/>
           <a:lstStyle/>
           <a:p>
             <a:pPr indent="0" marL="0">
@@ -7302,9 +7026,7 @@
           <a:ln/>
         </p:spPr>
         <p:txBody>
-          <a:bodyPr wrap="square" rtlCol="0" anchor="ctr">
-            <a:normAutofit/>
-          </a:bodyPr>
+          <a:bodyPr wrap="square" rtlCol="0" anchor="ctr"/>
           <a:lstStyle/>
           <a:p>
             <a:pPr algn="r" indent="0" marL="0">
